--- a/slides/afternoon_deck_scale_or_fail.pptx
+++ b/slides/afternoon_deck_scale_or_fail.pptx
@@ -4,19 +4,22 @@
   <p:sldMasterIdLst>
     <p:sldMasterId id="2147483648" r:id="rId1"/>
   </p:sldMasterIdLst>
+  <p:notesMasterIdLst>
+    <p:notesMasterId r:id="rId14"/>
+  </p:notesMasterIdLst>
   <p:sldIdLst>
-    <p:sldId id="256" r:id="rId7"/>
-    <p:sldId id="257" r:id="rId9"/>
-    <p:sldId id="258" r:id="rId10"/>
-    <p:sldId id="259" r:id="rId11"/>
-    <p:sldId id="260" r:id="rId12"/>
-    <p:sldId id="261" r:id="rId13"/>
-    <p:sldId id="262" r:id="rId14"/>
-    <p:sldId id="263" r:id="rId15"/>
-    <p:sldId id="264" r:id="rId16"/>
-    <p:sldId id="265" r:id="rId17"/>
-    <p:sldId id="266" r:id="rId18"/>
-    <p:sldId id="267" r:id="rId19"/>
+    <p:sldId id="256" r:id="rId2"/>
+    <p:sldId id="257" r:id="rId3"/>
+    <p:sldId id="258" r:id="rId4"/>
+    <p:sldId id="259" r:id="rId5"/>
+    <p:sldId id="260" r:id="rId6"/>
+    <p:sldId id="261" r:id="rId7"/>
+    <p:sldId id="262" r:id="rId8"/>
+    <p:sldId id="263" r:id="rId9"/>
+    <p:sldId id="264" r:id="rId10"/>
+    <p:sldId id="265" r:id="rId11"/>
+    <p:sldId id="266" r:id="rId12"/>
+    <p:sldId id="267" r:id="rId13"/>
   </p:sldIdLst>
   <p:sldSz cx="9144000" cy="6858000" type="screen4x3"/>
   <p:notesSz cx="6858000" cy="9144000"/>
@@ -115,11 +118,222 @@
       </a:defRPr>
     </a:lvl9pPr>
   </p:defaultTextStyle>
+  <p:extLst>
+    <p:ext uri="{EFAFB233-063F-42B5-8137-9DF3F51BA10A}">
+      <p15:sldGuideLst xmlns:p15="http://schemas.microsoft.com/office/powerpoint/2012/main">
+        <p15:guide id="1" orient="horz" pos="2160">
+          <p15:clr>
+            <a:srgbClr val="A4A3A4"/>
+          </p15:clr>
+        </p15:guide>
+        <p15:guide id="2" pos="2880">
+          <p15:clr>
+            <a:srgbClr val="A4A3A4"/>
+          </p15:clr>
+        </p15:guide>
+      </p15:sldGuideLst>
+    </p:ext>
+  </p:extLst>
 </p:presentation>
 </file>
 
+<file path=ppt/changesInfos/changesInfo1.xml><?xml version="1.0" encoding="utf-8"?>
+<pc:chgInfo xmlns:a="http://schemas.openxmlformats.org/drawingml/2006/main" xmlns:r="http://schemas.openxmlformats.org/officeDocument/2006/relationships" xmlns:ac="http://schemas.microsoft.com/office/drawing/2013/main/command" xmlns:pc="http://schemas.microsoft.com/office/powerpoint/2013/main/command">
+  <pc:docChgLst>
+    <pc:chgData name="Mike Hoffman" userId="c89afae9-2ab1-4454-9d15-124c09a77240" providerId="ADAL" clId="{C92867C0-20CC-4CF3-B09C-9485EE8A71FC}"/>
+    <pc:docChg chg="custSel modSld">
+      <pc:chgData name="Mike Hoffman" userId="c89afae9-2ab1-4454-9d15-124c09a77240" providerId="ADAL" clId="{C92867C0-20CC-4CF3-B09C-9485EE8A71FC}" dt="2026-02-09T12:37:27.014" v="300" actId="20577"/>
+      <pc:docMkLst>
+        <pc:docMk/>
+      </pc:docMkLst>
+      <pc:sldChg chg="modSp mod">
+        <pc:chgData name="Mike Hoffman" userId="c89afae9-2ab1-4454-9d15-124c09a77240" providerId="ADAL" clId="{C92867C0-20CC-4CF3-B09C-9485EE8A71FC}" dt="2026-02-09T12:34:12.054" v="1" actId="255"/>
+        <pc:sldMkLst>
+          <pc:docMk/>
+          <pc:sldMk cId="0" sldId="257"/>
+        </pc:sldMkLst>
+        <pc:spChg chg="mod">
+          <ac:chgData name="Mike Hoffman" userId="c89afae9-2ab1-4454-9d15-124c09a77240" providerId="ADAL" clId="{C92867C0-20CC-4CF3-B09C-9485EE8A71FC}" dt="2026-02-09T12:34:12.054" v="1" actId="255"/>
+          <ac:spMkLst>
+            <pc:docMk/>
+            <pc:sldMk cId="0" sldId="257"/>
+            <ac:spMk id="3" creationId="{00000000-0000-0000-0000-000000000000}"/>
+          </ac:spMkLst>
+        </pc:spChg>
+      </pc:sldChg>
+      <pc:sldChg chg="modSp mod">
+        <pc:chgData name="Mike Hoffman" userId="c89afae9-2ab1-4454-9d15-124c09a77240" providerId="ADAL" clId="{C92867C0-20CC-4CF3-B09C-9485EE8A71FC}" dt="2026-02-09T12:34:23.063" v="22" actId="15"/>
+        <pc:sldMkLst>
+          <pc:docMk/>
+          <pc:sldMk cId="0" sldId="258"/>
+        </pc:sldMkLst>
+        <pc:spChg chg="mod">
+          <ac:chgData name="Mike Hoffman" userId="c89afae9-2ab1-4454-9d15-124c09a77240" providerId="ADAL" clId="{C92867C0-20CC-4CF3-B09C-9485EE8A71FC}" dt="2026-02-09T12:34:23.063" v="22" actId="15"/>
+          <ac:spMkLst>
+            <pc:docMk/>
+            <pc:sldMk cId="0" sldId="258"/>
+            <ac:spMk id="3" creationId="{00000000-0000-0000-0000-000000000000}"/>
+          </ac:spMkLst>
+        </pc:spChg>
+      </pc:sldChg>
+      <pc:sldChg chg="modSp mod">
+        <pc:chgData name="Mike Hoffman" userId="c89afae9-2ab1-4454-9d15-124c09a77240" providerId="ADAL" clId="{C92867C0-20CC-4CF3-B09C-9485EE8A71FC}" dt="2026-02-09T12:34:31.246" v="23" actId="15"/>
+        <pc:sldMkLst>
+          <pc:docMk/>
+          <pc:sldMk cId="0" sldId="259"/>
+        </pc:sldMkLst>
+        <pc:spChg chg="mod">
+          <ac:chgData name="Mike Hoffman" userId="c89afae9-2ab1-4454-9d15-124c09a77240" providerId="ADAL" clId="{C92867C0-20CC-4CF3-B09C-9485EE8A71FC}" dt="2026-02-09T12:34:31.246" v="23" actId="15"/>
+          <ac:spMkLst>
+            <pc:docMk/>
+            <pc:sldMk cId="0" sldId="259"/>
+            <ac:spMk id="3" creationId="{00000000-0000-0000-0000-000000000000}"/>
+          </ac:spMkLst>
+        </pc:spChg>
+      </pc:sldChg>
+      <pc:sldChg chg="modSp mod">
+        <pc:chgData name="Mike Hoffman" userId="c89afae9-2ab1-4454-9d15-124c09a77240" providerId="ADAL" clId="{C92867C0-20CC-4CF3-B09C-9485EE8A71FC}" dt="2026-02-09T12:34:49.526" v="30" actId="20577"/>
+        <pc:sldMkLst>
+          <pc:docMk/>
+          <pc:sldMk cId="0" sldId="260"/>
+        </pc:sldMkLst>
+        <pc:spChg chg="mod">
+          <ac:chgData name="Mike Hoffman" userId="c89afae9-2ab1-4454-9d15-124c09a77240" providerId="ADAL" clId="{C92867C0-20CC-4CF3-B09C-9485EE8A71FC}" dt="2026-02-09T12:34:49.526" v="30" actId="20577"/>
+          <ac:spMkLst>
+            <pc:docMk/>
+            <pc:sldMk cId="0" sldId="260"/>
+            <ac:spMk id="3" creationId="{00000000-0000-0000-0000-000000000000}"/>
+          </ac:spMkLst>
+        </pc:spChg>
+      </pc:sldChg>
+      <pc:sldChg chg="modSp mod">
+        <pc:chgData name="Mike Hoffman" userId="c89afae9-2ab1-4454-9d15-124c09a77240" providerId="ADAL" clId="{C92867C0-20CC-4CF3-B09C-9485EE8A71FC}" dt="2026-02-09T12:35:03.952" v="35" actId="20577"/>
+        <pc:sldMkLst>
+          <pc:docMk/>
+          <pc:sldMk cId="0" sldId="261"/>
+        </pc:sldMkLst>
+        <pc:spChg chg="mod">
+          <ac:chgData name="Mike Hoffman" userId="c89afae9-2ab1-4454-9d15-124c09a77240" providerId="ADAL" clId="{C92867C0-20CC-4CF3-B09C-9485EE8A71FC}" dt="2026-02-09T12:35:03.952" v="35" actId="20577"/>
+          <ac:spMkLst>
+            <pc:docMk/>
+            <pc:sldMk cId="0" sldId="261"/>
+            <ac:spMk id="3" creationId="{00000000-0000-0000-0000-000000000000}"/>
+          </ac:spMkLst>
+        </pc:spChg>
+      </pc:sldChg>
+      <pc:sldChg chg="modSp mod">
+        <pc:chgData name="Mike Hoffman" userId="c89afae9-2ab1-4454-9d15-124c09a77240" providerId="ADAL" clId="{C92867C0-20CC-4CF3-B09C-9485EE8A71FC}" dt="2026-02-09T12:35:40.732" v="107" actId="20577"/>
+        <pc:sldMkLst>
+          <pc:docMk/>
+          <pc:sldMk cId="0" sldId="262"/>
+        </pc:sldMkLst>
+        <pc:spChg chg="mod">
+          <ac:chgData name="Mike Hoffman" userId="c89afae9-2ab1-4454-9d15-124c09a77240" providerId="ADAL" clId="{C92867C0-20CC-4CF3-B09C-9485EE8A71FC}" dt="2026-02-09T12:35:13.638" v="41" actId="20577"/>
+          <ac:spMkLst>
+            <pc:docMk/>
+            <pc:sldMk cId="0" sldId="262"/>
+            <ac:spMk id="2" creationId="{00000000-0000-0000-0000-000000000000}"/>
+          </ac:spMkLst>
+        </pc:spChg>
+        <pc:spChg chg="mod">
+          <ac:chgData name="Mike Hoffman" userId="c89afae9-2ab1-4454-9d15-124c09a77240" providerId="ADAL" clId="{C92867C0-20CC-4CF3-B09C-9485EE8A71FC}" dt="2026-02-09T12:35:40.732" v="107" actId="20577"/>
+          <ac:spMkLst>
+            <pc:docMk/>
+            <pc:sldMk cId="0" sldId="262"/>
+            <ac:spMk id="3" creationId="{00000000-0000-0000-0000-000000000000}"/>
+          </ac:spMkLst>
+        </pc:spChg>
+      </pc:sldChg>
+      <pc:sldChg chg="modSp mod">
+        <pc:chgData name="Mike Hoffman" userId="c89afae9-2ab1-4454-9d15-124c09a77240" providerId="ADAL" clId="{C92867C0-20CC-4CF3-B09C-9485EE8A71FC}" dt="2026-02-09T12:35:56.684" v="112" actId="15"/>
+        <pc:sldMkLst>
+          <pc:docMk/>
+          <pc:sldMk cId="0" sldId="263"/>
+        </pc:sldMkLst>
+        <pc:spChg chg="mod">
+          <ac:chgData name="Mike Hoffman" userId="c89afae9-2ab1-4454-9d15-124c09a77240" providerId="ADAL" clId="{C92867C0-20CC-4CF3-B09C-9485EE8A71FC}" dt="2026-02-09T12:35:56.684" v="112" actId="15"/>
+          <ac:spMkLst>
+            <pc:docMk/>
+            <pc:sldMk cId="0" sldId="263"/>
+            <ac:spMk id="3" creationId="{00000000-0000-0000-0000-000000000000}"/>
+          </ac:spMkLst>
+        </pc:spChg>
+      </pc:sldChg>
+      <pc:sldChg chg="modSp mod">
+        <pc:chgData name="Mike Hoffman" userId="c89afae9-2ab1-4454-9d15-124c09a77240" providerId="ADAL" clId="{C92867C0-20CC-4CF3-B09C-9485EE8A71FC}" dt="2026-02-09T12:36:11.408" v="126" actId="20577"/>
+        <pc:sldMkLst>
+          <pc:docMk/>
+          <pc:sldMk cId="0" sldId="264"/>
+        </pc:sldMkLst>
+        <pc:spChg chg="mod">
+          <ac:chgData name="Mike Hoffman" userId="c89afae9-2ab1-4454-9d15-124c09a77240" providerId="ADAL" clId="{C92867C0-20CC-4CF3-B09C-9485EE8A71FC}" dt="2026-02-09T12:36:11.408" v="126" actId="20577"/>
+          <ac:spMkLst>
+            <pc:docMk/>
+            <pc:sldMk cId="0" sldId="264"/>
+            <ac:spMk id="3" creationId="{00000000-0000-0000-0000-000000000000}"/>
+          </ac:spMkLst>
+        </pc:spChg>
+      </pc:sldChg>
+      <pc:sldChg chg="modSp mod">
+        <pc:chgData name="Mike Hoffman" userId="c89afae9-2ab1-4454-9d15-124c09a77240" providerId="ADAL" clId="{C92867C0-20CC-4CF3-B09C-9485EE8A71FC}" dt="2026-02-09T12:36:19.088" v="135" actId="20577"/>
+        <pc:sldMkLst>
+          <pc:docMk/>
+          <pc:sldMk cId="0" sldId="265"/>
+        </pc:sldMkLst>
+        <pc:spChg chg="mod">
+          <ac:chgData name="Mike Hoffman" userId="c89afae9-2ab1-4454-9d15-124c09a77240" providerId="ADAL" clId="{C92867C0-20CC-4CF3-B09C-9485EE8A71FC}" dt="2026-02-09T12:36:19.088" v="135" actId="20577"/>
+          <ac:spMkLst>
+            <pc:docMk/>
+            <pc:sldMk cId="0" sldId="265"/>
+            <ac:spMk id="2" creationId="{00000000-0000-0000-0000-000000000000}"/>
+          </ac:spMkLst>
+        </pc:spChg>
+      </pc:sldChg>
+      <pc:sldChg chg="modSp mod">
+        <pc:chgData name="Mike Hoffman" userId="c89afae9-2ab1-4454-9d15-124c09a77240" providerId="ADAL" clId="{C92867C0-20CC-4CF3-B09C-9485EE8A71FC}" dt="2026-02-09T12:36:44.301" v="158" actId="20577"/>
+        <pc:sldMkLst>
+          <pc:docMk/>
+          <pc:sldMk cId="0" sldId="266"/>
+        </pc:sldMkLst>
+        <pc:spChg chg="mod">
+          <ac:chgData name="Mike Hoffman" userId="c89afae9-2ab1-4454-9d15-124c09a77240" providerId="ADAL" clId="{C92867C0-20CC-4CF3-B09C-9485EE8A71FC}" dt="2026-02-09T12:36:41.271" v="152" actId="20577"/>
+          <ac:spMkLst>
+            <pc:docMk/>
+            <pc:sldMk cId="0" sldId="266"/>
+            <ac:spMk id="2" creationId="{00000000-0000-0000-0000-000000000000}"/>
+          </ac:spMkLst>
+        </pc:spChg>
+        <pc:spChg chg="mod">
+          <ac:chgData name="Mike Hoffman" userId="c89afae9-2ab1-4454-9d15-124c09a77240" providerId="ADAL" clId="{C92867C0-20CC-4CF3-B09C-9485EE8A71FC}" dt="2026-02-09T12:36:44.301" v="158" actId="20577"/>
+          <ac:spMkLst>
+            <pc:docMk/>
+            <pc:sldMk cId="0" sldId="266"/>
+            <ac:spMk id="3" creationId="{00000000-0000-0000-0000-000000000000}"/>
+          </ac:spMkLst>
+        </pc:spChg>
+      </pc:sldChg>
+      <pc:sldChg chg="modSp mod">
+        <pc:chgData name="Mike Hoffman" userId="c89afae9-2ab1-4454-9d15-124c09a77240" providerId="ADAL" clId="{C92867C0-20CC-4CF3-B09C-9485EE8A71FC}" dt="2026-02-09T12:37:27.014" v="300" actId="20577"/>
+        <pc:sldMkLst>
+          <pc:docMk/>
+          <pc:sldMk cId="0" sldId="267"/>
+        </pc:sldMkLst>
+        <pc:spChg chg="mod">
+          <ac:chgData name="Mike Hoffman" userId="c89afae9-2ab1-4454-9d15-124c09a77240" providerId="ADAL" clId="{C92867C0-20CC-4CF3-B09C-9485EE8A71FC}" dt="2026-02-09T12:37:27.014" v="300" actId="20577"/>
+          <ac:spMkLst>
+            <pc:docMk/>
+            <pc:sldMk cId="0" sldId="267"/>
+            <ac:spMk id="3" creationId="{00000000-0000-0000-0000-000000000000}"/>
+          </ac:spMkLst>
+        </pc:spChg>
+      </pc:sldChg>
+    </pc:docChg>
+  </pc:docChgLst>
+</pc:chgInfo>
+</file>
+
 <file path=ppt/notesMasters/notesMaster1.xml><?xml version="1.0" encoding="utf-8"?>
-<p:notesMaster xmlns:a="http://schemas.openxmlformats.org/drawingml/2006/main" xmlns:p="http://schemas.openxmlformats.org/presentationml/2006/main" xmlns:r="http://schemas.openxmlformats.org/officeDocument/2006/relationships">
+<p:notesMaster xmlns:a="http://schemas.openxmlformats.org/drawingml/2006/main" xmlns:r="http://schemas.openxmlformats.org/officeDocument/2006/relationships" xmlns:p="http://schemas.openxmlformats.org/presentationml/2006/main">
   <p:cSld>
     <p:bg>
       <p:bgRef idx="1001">
@@ -140,241 +354,16 @@
           <a:chExt cx="0" cy="0"/>
         </a:xfrm>
       </p:grpSpPr>
-      <p:sp>
-        <p:nvSpPr>
-          <p:cNvPr id="2" name="Header Placeholder 1"/>
-          <p:cNvSpPr>
-            <a:spLocks noGrp="1"/>
-          </p:cNvSpPr>
-          <p:nvPr>
-            <p:ph type="hdr" sz="quarter"/>
-          </p:nvPr>
-        </p:nvSpPr>
-        <p:spPr>
-          <a:xfrm>
-            <a:off x="0" y="0"/>
-            <a:ext cx="2971800" cy="457200"/>
-          </a:xfrm>
-          <a:prstGeom prst="rect">
-            <a:avLst/>
-          </a:prstGeom>
-        </p:spPr>
-        <p:txBody>
-          <a:bodyPr vert="horz" lIns="91440" tIns="45720" rIns="91440" bIns="45720" rtlCol="0"/>
-          <a:lstStyle>
-            <a:lvl1pPr algn="l">
-              <a:defRPr sz="1200"/>
-            </a:lvl1pPr>
-          </a:lstStyle>
-          <a:p>
-            <a:endParaRPr lang="en-US"/>
-          </a:p>
-        </p:txBody>
-      </p:sp>
-      <p:sp>
-        <p:nvSpPr>
-          <p:cNvPr id="3" name="Date Placeholder 2"/>
-          <p:cNvSpPr>
-            <a:spLocks noGrp="1"/>
-          </p:cNvSpPr>
-          <p:nvPr>
-            <p:ph type="dt" idx="1"/>
-          </p:nvPr>
-        </p:nvSpPr>
-        <p:spPr>
-          <a:xfrm>
-            <a:off x="3884613" y="0"/>
-            <a:ext cx="2971800" cy="457200"/>
-          </a:xfrm>
-          <a:prstGeom prst="rect">
-            <a:avLst/>
-          </a:prstGeom>
-        </p:spPr>
-        <p:txBody>
-          <a:bodyPr vert="horz" lIns="91440" tIns="45720" rIns="91440" bIns="45720" rtlCol="0"/>
-          <a:lstStyle>
-            <a:lvl1pPr algn="r">
-              <a:defRPr sz="1200"/>
-            </a:lvl1pPr>
-          </a:lstStyle>
-          <a:p>
-            <a:fld id="{0F89C1C7-3DCD-1040-A9CF-14679D8B5DDD}" type="datetimeFigureOut">
-              <a:rPr lang="en-US" smtClean="0"/>
-              <a:t>10/17/16</a:t>
-            </a:fld>
-            <a:endParaRPr lang="en-US"/>
-          </a:p>
-        </p:txBody>
-      </p:sp>
-      <p:sp>
-        <p:nvSpPr>
-          <p:cNvPr id="4" name="Slide Image Placeholder 3"/>
-          <p:cNvSpPr>
-            <a:spLocks noGrp="1" noRot="1" noChangeAspect="1"/>
-          </p:cNvSpPr>
-          <p:nvPr>
-            <p:ph type="sldImg" idx="2"/>
-          </p:nvPr>
-        </p:nvSpPr>
-        <p:spPr>
-          <a:xfrm>
-            <a:off x="1143000" y="685800"/>
-            <a:ext cx="4572000" cy="3429000"/>
-          </a:xfrm>
-          <a:prstGeom prst="rect">
-            <a:avLst/>
-          </a:prstGeom>
-          <a:noFill/>
-          <a:ln w="12700">
-            <a:solidFill>
-              <a:prstClr val="black"/>
-            </a:solidFill>
-          </a:ln>
-        </p:spPr>
-        <p:txBody>
-          <a:bodyPr vert="horz" lIns="91440" tIns="45720" rIns="91440" bIns="45720" rtlCol="0" anchor="ctr"/>
-          <a:lstStyle/>
-          <a:p>
-            <a:endParaRPr lang="en-US"/>
-          </a:p>
-        </p:txBody>
-      </p:sp>
-      <p:sp>
-        <p:nvSpPr>
-          <p:cNvPr id="5" name="Notes Placeholder 4"/>
-          <p:cNvSpPr>
-            <a:spLocks noGrp="1"/>
-          </p:cNvSpPr>
-          <p:nvPr>
-            <p:ph type="body" sz="quarter" idx="3"/>
-          </p:nvPr>
-        </p:nvSpPr>
-        <p:spPr>
-          <a:xfrm>
-            <a:off x="685800" y="4343400"/>
-            <a:ext cx="5486400" cy="4114800"/>
-          </a:xfrm>
-          <a:prstGeom prst="rect">
-            <a:avLst/>
-          </a:prstGeom>
-        </p:spPr>
-        <p:txBody>
-          <a:bodyPr vert="horz" lIns="91440" tIns="45720" rIns="91440" bIns="45720" rtlCol="0"/>
-          <a:lstStyle/>
-          <a:p>
-            <a:pPr lvl="0"/>
-            <a:r>
-              <a:rPr lang="en-US" smtClean="0"/>
-              <a:t>Click to edit Master text styles</a:t>
-            </a:r>
-          </a:p>
-          <a:p>
-            <a:pPr lvl="1"/>
-            <a:r>
-              <a:rPr lang="en-US" smtClean="0"/>
-              <a:t>Second level</a:t>
-            </a:r>
-          </a:p>
-          <a:p>
-            <a:pPr lvl="2"/>
-            <a:r>
-              <a:rPr lang="en-US" smtClean="0"/>
-              <a:t>Third level</a:t>
-            </a:r>
-          </a:p>
-          <a:p>
-            <a:pPr lvl="3"/>
-            <a:r>
-              <a:rPr lang="en-US" smtClean="0"/>
-              <a:t>Fourth level</a:t>
-            </a:r>
-          </a:p>
-          <a:p>
-            <a:pPr lvl="4"/>
-            <a:r>
-              <a:rPr lang="en-US" smtClean="0"/>
-              <a:t>Fifth level</a:t>
-            </a:r>
-            <a:endParaRPr lang="en-US"/>
-          </a:p>
-        </p:txBody>
-      </p:sp>
-      <p:sp>
-        <p:nvSpPr>
-          <p:cNvPr id="6" name="Footer Placeholder 5"/>
-          <p:cNvSpPr>
-            <a:spLocks noGrp="1"/>
-          </p:cNvSpPr>
-          <p:nvPr>
-            <p:ph type="ftr" sz="quarter" idx="4"/>
-          </p:nvPr>
-        </p:nvSpPr>
-        <p:spPr>
-          <a:xfrm>
-            <a:off x="0" y="8685213"/>
-            <a:ext cx="2971800" cy="457200"/>
-          </a:xfrm>
-          <a:prstGeom prst="rect">
-            <a:avLst/>
-          </a:prstGeom>
-        </p:spPr>
-        <p:txBody>
-          <a:bodyPr vert="horz" lIns="91440" tIns="45720" rIns="91440" bIns="45720" rtlCol="0" anchor="b"/>
-          <a:lstStyle>
-            <a:lvl1pPr algn="l">
-              <a:defRPr sz="1200"/>
-            </a:lvl1pPr>
-          </a:lstStyle>
-          <a:p>
-            <a:endParaRPr lang="en-US"/>
-          </a:p>
-        </p:txBody>
-      </p:sp>
-      <p:sp>
-        <p:nvSpPr>
-          <p:cNvPr id="7" name="Slide Number Placeholder 6"/>
-          <p:cNvSpPr>
-            <a:spLocks noGrp="1"/>
-          </p:cNvSpPr>
-          <p:nvPr>
-            <p:ph type="sldNum" sz="quarter" idx="5"/>
-          </p:nvPr>
-        </p:nvSpPr>
-        <p:spPr>
-          <a:xfrm>
-            <a:off x="3884613" y="8685213"/>
-            <a:ext cx="2971800" cy="457200"/>
-          </a:xfrm>
-          <a:prstGeom prst="rect">
-            <a:avLst/>
-          </a:prstGeom>
-        </p:spPr>
-        <p:txBody>
-          <a:bodyPr vert="horz" lIns="91440" tIns="45720" rIns="91440" bIns="45720" rtlCol="0" anchor="b"/>
-          <a:lstStyle>
-            <a:lvl1pPr algn="r">
-              <a:defRPr sz="1200"/>
-            </a:lvl1pPr>
-          </a:lstStyle>
-          <a:p>
-            <a:fld id="{BB5E49A5-4136-284D-997B-48E1D791AD67}" type="slidenum">
-              <a:rPr lang="en-US" smtClean="0"/>
-              <a:t>‹#›</a:t>
-            </a:fld>
-            <a:endParaRPr lang="en-US"/>
-          </a:p>
-        </p:txBody>
-      </p:sp>
     </p:spTree>
     <p:extLst>
       <p:ext uri="{BB962C8B-B14F-4D97-AF65-F5344CB8AC3E}">
-        <p14:creationId xmlns:p14="http://schemas.microsoft.com/office/powerpoint/2010/main" val="2623252185"/>
+        <p14:creationId xmlns:p14="http://schemas.microsoft.com/office/powerpoint/2010/main" val="3359525647"/>
       </p:ext>
     </p:extLst>
   </p:cSld>
   <p:clrMap bg1="lt1" tx1="dk1" bg2="lt2" tx2="dk2" accent1="accent1" accent2="accent2" accent3="accent3" accent4="accent4" accent5="accent5" accent6="accent6" hlink="hlink" folHlink="folHlink"/>
   <p:notesStyle>
-    <a:lvl1pPr marL="0" algn="l" defTabSz="457200" rtl="0" eaLnBrk="1" latinLnBrk="0" hangingPunct="1">
+    <a:lvl1pPr marL="0" algn="l" defTabSz="914400" rtl="0" eaLnBrk="1" latinLnBrk="0" hangingPunct="1">
       <a:defRPr sz="1200" kern="1200">
         <a:solidFill>
           <a:schemeClr val="tx1"/>
@@ -384,7 +373,7 @@
         <a:cs typeface="+mn-cs"/>
       </a:defRPr>
     </a:lvl1pPr>
-    <a:lvl2pPr marL="457200" algn="l" defTabSz="457200" rtl="0" eaLnBrk="1" latinLnBrk="0" hangingPunct="1">
+    <a:lvl2pPr marL="457200" algn="l" defTabSz="914400" rtl="0" eaLnBrk="1" latinLnBrk="0" hangingPunct="1">
       <a:defRPr sz="1200" kern="1200">
         <a:solidFill>
           <a:schemeClr val="tx1"/>
@@ -394,7 +383,7 @@
         <a:cs typeface="+mn-cs"/>
       </a:defRPr>
     </a:lvl2pPr>
-    <a:lvl3pPr marL="914400" algn="l" defTabSz="457200" rtl="0" eaLnBrk="1" latinLnBrk="0" hangingPunct="1">
+    <a:lvl3pPr marL="914400" algn="l" defTabSz="914400" rtl="0" eaLnBrk="1" latinLnBrk="0" hangingPunct="1">
       <a:defRPr sz="1200" kern="1200">
         <a:solidFill>
           <a:schemeClr val="tx1"/>
@@ -404,7 +393,7 @@
         <a:cs typeface="+mn-cs"/>
       </a:defRPr>
     </a:lvl3pPr>
-    <a:lvl4pPr marL="1371600" algn="l" defTabSz="457200" rtl="0" eaLnBrk="1" latinLnBrk="0" hangingPunct="1">
+    <a:lvl4pPr marL="1371600" algn="l" defTabSz="914400" rtl="0" eaLnBrk="1" latinLnBrk="0" hangingPunct="1">
       <a:defRPr sz="1200" kern="1200">
         <a:solidFill>
           <a:schemeClr val="tx1"/>
@@ -414,7 +403,7 @@
         <a:cs typeface="+mn-cs"/>
       </a:defRPr>
     </a:lvl4pPr>
-    <a:lvl5pPr marL="1828800" algn="l" defTabSz="457200" rtl="0" eaLnBrk="1" latinLnBrk="0" hangingPunct="1">
+    <a:lvl5pPr marL="1828800" algn="l" defTabSz="914400" rtl="0" eaLnBrk="1" latinLnBrk="0" hangingPunct="1">
       <a:defRPr sz="1200" kern="1200">
         <a:solidFill>
           <a:schemeClr val="tx1"/>
@@ -424,7 +413,7 @@
         <a:cs typeface="+mn-cs"/>
       </a:defRPr>
     </a:lvl5pPr>
-    <a:lvl6pPr marL="2286000" algn="l" defTabSz="457200" rtl="0" eaLnBrk="1" latinLnBrk="0" hangingPunct="1">
+    <a:lvl6pPr marL="2286000" algn="l" defTabSz="914400" rtl="0" eaLnBrk="1" latinLnBrk="0" hangingPunct="1">
       <a:defRPr sz="1200" kern="1200">
         <a:solidFill>
           <a:schemeClr val="tx1"/>
@@ -434,7 +423,7 @@
         <a:cs typeface="+mn-cs"/>
       </a:defRPr>
     </a:lvl6pPr>
-    <a:lvl7pPr marL="2743200" algn="l" defTabSz="457200" rtl="0" eaLnBrk="1" latinLnBrk="0" hangingPunct="1">
+    <a:lvl7pPr marL="2743200" algn="l" defTabSz="914400" rtl="0" eaLnBrk="1" latinLnBrk="0" hangingPunct="1">
       <a:defRPr sz="1200" kern="1200">
         <a:solidFill>
           <a:schemeClr val="tx1"/>
@@ -444,7 +433,7 @@
         <a:cs typeface="+mn-cs"/>
       </a:defRPr>
     </a:lvl7pPr>
-    <a:lvl8pPr marL="3200400" algn="l" defTabSz="457200" rtl="0" eaLnBrk="1" latinLnBrk="0" hangingPunct="1">
+    <a:lvl8pPr marL="3200400" algn="l" defTabSz="914400" rtl="0" eaLnBrk="1" latinLnBrk="0" hangingPunct="1">
       <a:defRPr sz="1200" kern="1200">
         <a:solidFill>
           <a:schemeClr val="tx1"/>
@@ -454,7 +443,7 @@
         <a:cs typeface="+mn-cs"/>
       </a:defRPr>
     </a:lvl8pPr>
-    <a:lvl9pPr marL="3657600" algn="l" defTabSz="457200" rtl="0" eaLnBrk="1" latinLnBrk="0" hangingPunct="1">
+    <a:lvl9pPr marL="3657600" algn="l" defTabSz="914400" rtl="0" eaLnBrk="1" latinLnBrk="0" hangingPunct="1">
       <a:defRPr sz="1200" kern="1200">
         <a:solidFill>
           <a:schemeClr val="tx1"/>
@@ -469,7 +458,7 @@
 </file>
 
 <file path=ppt/notesSlides/notesSlide1.xml><?xml version="1.0" encoding="utf-8"?>
-<p:notes xmlns:a="http://schemas.openxmlformats.org/drawingml/2006/main" xmlns:p="http://schemas.openxmlformats.org/presentationml/2006/main" xmlns:r="http://schemas.openxmlformats.org/officeDocument/2006/relationships">
+<p:notes xmlns:a="http://schemas.openxmlformats.org/drawingml/2006/main" xmlns:r="http://schemas.openxmlformats.org/officeDocument/2006/relationships" xmlns:p="http://schemas.openxmlformats.org/presentationml/2006/main">
   <p:cSld>
     <p:spTree>
       <p:nvGrpSpPr>
@@ -489,7 +478,7 @@
         <p:nvSpPr>
           <p:cNvPr id="2" name="Slide Image Placeholder 1"/>
           <p:cNvSpPr>
-            <a:spLocks noGrp="1"/>
+            <a:spLocks noGrp="1" noRot="1" noChangeAspect="1"/>
           </p:cNvSpPr>
           <p:nvPr>
             <p:ph type="sldImg" idx="2"/>
@@ -504,7 +493,7 @@
             <a:spLocks noGrp="1"/>
           </p:cNvSpPr>
           <p:nvPr>
-            <p:ph type="body" idx="3" sz="quarter"/>
+            <p:ph type="body" sz="quarter" idx="3"/>
           </p:nvPr>
         </p:nvSpPr>
         <p:spPr/>
@@ -530,7 +519,7 @@
             <a:spLocks noGrp="1"/>
           </p:cNvSpPr>
           <p:nvPr>
-            <p:ph type="sldNum" idx="5" sz="quarter"/>
+            <p:ph type="sldNum" sz="quarter" idx="5"/>
           </p:nvPr>
         </p:nvSpPr>
         <p:spPr/>
@@ -544,7 +533,7 @@
 </file>
 
 <file path=ppt/notesSlides/notesSlide10.xml><?xml version="1.0" encoding="utf-8"?>
-<p:notes xmlns:a="http://schemas.openxmlformats.org/drawingml/2006/main" xmlns:p="http://schemas.openxmlformats.org/presentationml/2006/main" xmlns:r="http://schemas.openxmlformats.org/officeDocument/2006/relationships">
+<p:notes xmlns:a="http://schemas.openxmlformats.org/drawingml/2006/main" xmlns:r="http://schemas.openxmlformats.org/officeDocument/2006/relationships" xmlns:p="http://schemas.openxmlformats.org/presentationml/2006/main">
   <p:cSld>
     <p:spTree>
       <p:nvGrpSpPr>
@@ -564,7 +553,7 @@
         <p:nvSpPr>
           <p:cNvPr id="2" name="Slide Image Placeholder 1"/>
           <p:cNvSpPr>
-            <a:spLocks noGrp="1"/>
+            <a:spLocks noGrp="1" noRot="1" noChangeAspect="1"/>
           </p:cNvSpPr>
           <p:nvPr>
             <p:ph type="sldImg" idx="2"/>
@@ -579,7 +568,7 @@
             <a:spLocks noGrp="1"/>
           </p:cNvSpPr>
           <p:nvPr>
-            <p:ph type="body" idx="3" sz="quarter"/>
+            <p:ph type="body" sz="quarter" idx="3"/>
           </p:nvPr>
         </p:nvSpPr>
         <p:spPr/>
@@ -600,7 +589,7 @@
             <a:spLocks noGrp="1"/>
           </p:cNvSpPr>
           <p:nvPr>
-            <p:ph type="sldNum" idx="5" sz="quarter"/>
+            <p:ph type="sldNum" sz="quarter" idx="5"/>
           </p:nvPr>
         </p:nvSpPr>
         <p:spPr/>
@@ -614,7 +603,7 @@
 </file>
 
 <file path=ppt/notesSlides/notesSlide2.xml><?xml version="1.0" encoding="utf-8"?>
-<p:notes xmlns:a="http://schemas.openxmlformats.org/drawingml/2006/main" xmlns:p="http://schemas.openxmlformats.org/presentationml/2006/main" xmlns:r="http://schemas.openxmlformats.org/officeDocument/2006/relationships">
+<p:notes xmlns:a="http://schemas.openxmlformats.org/drawingml/2006/main" xmlns:r="http://schemas.openxmlformats.org/officeDocument/2006/relationships" xmlns:p="http://schemas.openxmlformats.org/presentationml/2006/main">
   <p:cSld>
     <p:spTree>
       <p:nvGrpSpPr>
@@ -634,7 +623,7 @@
         <p:nvSpPr>
           <p:cNvPr id="2" name="Slide Image Placeholder 1"/>
           <p:cNvSpPr>
-            <a:spLocks noGrp="1"/>
+            <a:spLocks noGrp="1" noRot="1" noChangeAspect="1"/>
           </p:cNvSpPr>
           <p:nvPr>
             <p:ph type="sldImg" idx="2"/>
@@ -649,7 +638,7 @@
             <a:spLocks noGrp="1"/>
           </p:cNvSpPr>
           <p:nvPr>
-            <p:ph type="body" idx="3" sz="quarter"/>
+            <p:ph type="body" sz="quarter" idx="3"/>
           </p:nvPr>
         </p:nvSpPr>
         <p:spPr/>
@@ -675,7 +664,7 @@
             <a:spLocks noGrp="1"/>
           </p:cNvSpPr>
           <p:nvPr>
-            <p:ph type="sldNum" idx="5" sz="quarter"/>
+            <p:ph type="sldNum" sz="quarter" idx="5"/>
           </p:nvPr>
         </p:nvSpPr>
         <p:spPr/>
@@ -689,7 +678,7 @@
 </file>
 
 <file path=ppt/notesSlides/notesSlide3.xml><?xml version="1.0" encoding="utf-8"?>
-<p:notes xmlns:a="http://schemas.openxmlformats.org/drawingml/2006/main" xmlns:p="http://schemas.openxmlformats.org/presentationml/2006/main" xmlns:r="http://schemas.openxmlformats.org/officeDocument/2006/relationships">
+<p:notes xmlns:a="http://schemas.openxmlformats.org/drawingml/2006/main" xmlns:r="http://schemas.openxmlformats.org/officeDocument/2006/relationships" xmlns:p="http://schemas.openxmlformats.org/presentationml/2006/main">
   <p:cSld>
     <p:spTree>
       <p:nvGrpSpPr>
@@ -709,7 +698,7 @@
         <p:nvSpPr>
           <p:cNvPr id="2" name="Slide Image Placeholder 1"/>
           <p:cNvSpPr>
-            <a:spLocks noGrp="1"/>
+            <a:spLocks noGrp="1" noRot="1" noChangeAspect="1"/>
           </p:cNvSpPr>
           <p:nvPr>
             <p:ph type="sldImg" idx="2"/>
@@ -724,7 +713,7 @@
             <a:spLocks noGrp="1"/>
           </p:cNvSpPr>
           <p:nvPr>
-            <p:ph type="body" idx="3" sz="quarter"/>
+            <p:ph type="body" sz="quarter" idx="3"/>
           </p:nvPr>
         </p:nvSpPr>
         <p:spPr/>
@@ -745,7 +734,7 @@
             <a:spLocks noGrp="1"/>
           </p:cNvSpPr>
           <p:nvPr>
-            <p:ph type="sldNum" idx="5" sz="quarter"/>
+            <p:ph type="sldNum" sz="quarter" idx="5"/>
           </p:nvPr>
         </p:nvSpPr>
         <p:spPr/>
@@ -759,7 +748,7 @@
 </file>
 
 <file path=ppt/notesSlides/notesSlide4.xml><?xml version="1.0" encoding="utf-8"?>
-<p:notes xmlns:a="http://schemas.openxmlformats.org/drawingml/2006/main" xmlns:p="http://schemas.openxmlformats.org/presentationml/2006/main" xmlns:r="http://schemas.openxmlformats.org/officeDocument/2006/relationships">
+<p:notes xmlns:a="http://schemas.openxmlformats.org/drawingml/2006/main" xmlns:r="http://schemas.openxmlformats.org/officeDocument/2006/relationships" xmlns:p="http://schemas.openxmlformats.org/presentationml/2006/main">
   <p:cSld>
     <p:spTree>
       <p:nvGrpSpPr>
@@ -779,7 +768,7 @@
         <p:nvSpPr>
           <p:cNvPr id="2" name="Slide Image Placeholder 1"/>
           <p:cNvSpPr>
-            <a:spLocks noGrp="1"/>
+            <a:spLocks noGrp="1" noRot="1" noChangeAspect="1"/>
           </p:cNvSpPr>
           <p:nvPr>
             <p:ph type="sldImg" idx="2"/>
@@ -794,7 +783,7 @@
             <a:spLocks noGrp="1"/>
           </p:cNvSpPr>
           <p:nvPr>
-            <p:ph type="body" idx="3" sz="quarter"/>
+            <p:ph type="body" sz="quarter" idx="3"/>
           </p:nvPr>
         </p:nvSpPr>
         <p:spPr/>
@@ -815,7 +804,7 @@
             <a:spLocks noGrp="1"/>
           </p:cNvSpPr>
           <p:nvPr>
-            <p:ph type="sldNum" idx="5" sz="quarter"/>
+            <p:ph type="sldNum" sz="quarter" idx="5"/>
           </p:nvPr>
         </p:nvSpPr>
         <p:spPr/>
@@ -829,7 +818,7 @@
 </file>
 
 <file path=ppt/notesSlides/notesSlide5.xml><?xml version="1.0" encoding="utf-8"?>
-<p:notes xmlns:a="http://schemas.openxmlformats.org/drawingml/2006/main" xmlns:p="http://schemas.openxmlformats.org/presentationml/2006/main" xmlns:r="http://schemas.openxmlformats.org/officeDocument/2006/relationships">
+<p:notes xmlns:a="http://schemas.openxmlformats.org/drawingml/2006/main" xmlns:r="http://schemas.openxmlformats.org/officeDocument/2006/relationships" xmlns:p="http://schemas.openxmlformats.org/presentationml/2006/main">
   <p:cSld>
     <p:spTree>
       <p:nvGrpSpPr>
@@ -849,7 +838,7 @@
         <p:nvSpPr>
           <p:cNvPr id="2" name="Slide Image Placeholder 1"/>
           <p:cNvSpPr>
-            <a:spLocks noGrp="1"/>
+            <a:spLocks noGrp="1" noRot="1" noChangeAspect="1"/>
           </p:cNvSpPr>
           <p:nvPr>
             <p:ph type="sldImg" idx="2"/>
@@ -864,7 +853,7 @@
             <a:spLocks noGrp="1"/>
           </p:cNvSpPr>
           <p:nvPr>
-            <p:ph type="body" idx="3" sz="quarter"/>
+            <p:ph type="body" sz="quarter" idx="3"/>
           </p:nvPr>
         </p:nvSpPr>
         <p:spPr/>
@@ -890,7 +879,7 @@
             <a:spLocks noGrp="1"/>
           </p:cNvSpPr>
           <p:nvPr>
-            <p:ph type="sldNum" idx="5" sz="quarter"/>
+            <p:ph type="sldNum" sz="quarter" idx="5"/>
           </p:nvPr>
         </p:nvSpPr>
         <p:spPr/>
@@ -904,7 +893,7 @@
 </file>
 
 <file path=ppt/notesSlides/notesSlide6.xml><?xml version="1.0" encoding="utf-8"?>
-<p:notes xmlns:a="http://schemas.openxmlformats.org/drawingml/2006/main" xmlns:p="http://schemas.openxmlformats.org/presentationml/2006/main" xmlns:r="http://schemas.openxmlformats.org/officeDocument/2006/relationships">
+<p:notes xmlns:a="http://schemas.openxmlformats.org/drawingml/2006/main" xmlns:r="http://schemas.openxmlformats.org/officeDocument/2006/relationships" xmlns:p="http://schemas.openxmlformats.org/presentationml/2006/main">
   <p:cSld>
     <p:spTree>
       <p:nvGrpSpPr>
@@ -924,7 +913,7 @@
         <p:nvSpPr>
           <p:cNvPr id="2" name="Slide Image Placeholder 1"/>
           <p:cNvSpPr>
-            <a:spLocks noGrp="1"/>
+            <a:spLocks noGrp="1" noRot="1" noChangeAspect="1"/>
           </p:cNvSpPr>
           <p:nvPr>
             <p:ph type="sldImg" idx="2"/>
@@ -939,7 +928,7 @@
             <a:spLocks noGrp="1"/>
           </p:cNvSpPr>
           <p:nvPr>
-            <p:ph type="body" idx="3" sz="quarter"/>
+            <p:ph type="body" sz="quarter" idx="3"/>
           </p:nvPr>
         </p:nvSpPr>
         <p:spPr/>
@@ -960,7 +949,7 @@
             <a:spLocks noGrp="1"/>
           </p:cNvSpPr>
           <p:nvPr>
-            <p:ph type="sldNum" idx="5" sz="quarter"/>
+            <p:ph type="sldNum" sz="quarter" idx="5"/>
           </p:nvPr>
         </p:nvSpPr>
         <p:spPr/>
@@ -974,7 +963,7 @@
 </file>
 
 <file path=ppt/notesSlides/notesSlide7.xml><?xml version="1.0" encoding="utf-8"?>
-<p:notes xmlns:a="http://schemas.openxmlformats.org/drawingml/2006/main" xmlns:p="http://schemas.openxmlformats.org/presentationml/2006/main" xmlns:r="http://schemas.openxmlformats.org/officeDocument/2006/relationships">
+<p:notes xmlns:a="http://schemas.openxmlformats.org/drawingml/2006/main" xmlns:r="http://schemas.openxmlformats.org/officeDocument/2006/relationships" xmlns:p="http://schemas.openxmlformats.org/presentationml/2006/main">
   <p:cSld>
     <p:spTree>
       <p:nvGrpSpPr>
@@ -994,7 +983,7 @@
         <p:nvSpPr>
           <p:cNvPr id="2" name="Slide Image Placeholder 1"/>
           <p:cNvSpPr>
-            <a:spLocks noGrp="1"/>
+            <a:spLocks noGrp="1" noRot="1" noChangeAspect="1"/>
           </p:cNvSpPr>
           <p:nvPr>
             <p:ph type="sldImg" idx="2"/>
@@ -1009,7 +998,7 @@
             <a:spLocks noGrp="1"/>
           </p:cNvSpPr>
           <p:nvPr>
-            <p:ph type="body" idx="3" sz="quarter"/>
+            <p:ph type="body" sz="quarter" idx="3"/>
           </p:nvPr>
         </p:nvSpPr>
         <p:spPr/>
@@ -1030,7 +1019,7 @@
             <a:spLocks noGrp="1"/>
           </p:cNvSpPr>
           <p:nvPr>
-            <p:ph type="sldNum" idx="5" sz="quarter"/>
+            <p:ph type="sldNum" sz="quarter" idx="5"/>
           </p:nvPr>
         </p:nvSpPr>
         <p:spPr/>
@@ -1044,7 +1033,7 @@
 </file>
 
 <file path=ppt/notesSlides/notesSlide8.xml><?xml version="1.0" encoding="utf-8"?>
-<p:notes xmlns:a="http://schemas.openxmlformats.org/drawingml/2006/main" xmlns:p="http://schemas.openxmlformats.org/presentationml/2006/main" xmlns:r="http://schemas.openxmlformats.org/officeDocument/2006/relationships">
+<p:notes xmlns:a="http://schemas.openxmlformats.org/drawingml/2006/main" xmlns:r="http://schemas.openxmlformats.org/officeDocument/2006/relationships" xmlns:p="http://schemas.openxmlformats.org/presentationml/2006/main">
   <p:cSld>
     <p:spTree>
       <p:nvGrpSpPr>
@@ -1064,7 +1053,7 @@
         <p:nvSpPr>
           <p:cNvPr id="2" name="Slide Image Placeholder 1"/>
           <p:cNvSpPr>
-            <a:spLocks noGrp="1"/>
+            <a:spLocks noGrp="1" noRot="1" noChangeAspect="1"/>
           </p:cNvSpPr>
           <p:nvPr>
             <p:ph type="sldImg" idx="2"/>
@@ -1079,7 +1068,7 @@
             <a:spLocks noGrp="1"/>
           </p:cNvSpPr>
           <p:nvPr>
-            <p:ph type="body" idx="3" sz="quarter"/>
+            <p:ph type="body" sz="quarter" idx="3"/>
           </p:nvPr>
         </p:nvSpPr>
         <p:spPr/>
@@ -1100,7 +1089,7 @@
             <a:spLocks noGrp="1"/>
           </p:cNvSpPr>
           <p:nvPr>
-            <p:ph type="sldNum" idx="5" sz="quarter"/>
+            <p:ph type="sldNum" sz="quarter" idx="5"/>
           </p:nvPr>
         </p:nvSpPr>
         <p:spPr/>
@@ -1114,7 +1103,7 @@
 </file>
 
 <file path=ppt/notesSlides/notesSlide9.xml><?xml version="1.0" encoding="utf-8"?>
-<p:notes xmlns:a="http://schemas.openxmlformats.org/drawingml/2006/main" xmlns:p="http://schemas.openxmlformats.org/presentationml/2006/main" xmlns:r="http://schemas.openxmlformats.org/officeDocument/2006/relationships">
+<p:notes xmlns:a="http://schemas.openxmlformats.org/drawingml/2006/main" xmlns:r="http://schemas.openxmlformats.org/officeDocument/2006/relationships" xmlns:p="http://schemas.openxmlformats.org/presentationml/2006/main">
   <p:cSld>
     <p:spTree>
       <p:nvGrpSpPr>
@@ -1134,7 +1123,7 @@
         <p:nvSpPr>
           <p:cNvPr id="2" name="Slide Image Placeholder 1"/>
           <p:cNvSpPr>
-            <a:spLocks noGrp="1"/>
+            <a:spLocks noGrp="1" noRot="1" noChangeAspect="1"/>
           </p:cNvSpPr>
           <p:nvPr>
             <p:ph type="sldImg" idx="2"/>
@@ -1149,7 +1138,7 @@
             <a:spLocks noGrp="1"/>
           </p:cNvSpPr>
           <p:nvPr>
-            <p:ph type="body" idx="3" sz="quarter"/>
+            <p:ph type="body" sz="quarter" idx="3"/>
           </p:nvPr>
         </p:nvSpPr>
         <p:spPr/>
@@ -1175,7 +1164,7 @@
             <a:spLocks noGrp="1"/>
           </p:cNvSpPr>
           <p:nvPr>
-            <p:ph type="sldNum" idx="5" sz="quarter"/>
+            <p:ph type="sldNum" sz="quarter" idx="5"/>
           </p:nvPr>
         </p:nvSpPr>
         <p:spPr/>
@@ -1226,10 +1215,9 @@
           <a:lstStyle/>
           <a:p>
             <a:r>
-              <a:rPr lang="en-US" smtClean="0"/>
+              <a:rPr lang="en-US"/>
               <a:t>Click to edit Master title style</a:t>
             </a:r>
-            <a:endParaRPr lang="en-US"/>
           </a:p>
         </p:txBody>
       </p:sp>
@@ -1345,10 +1333,9 @@
           </a:lstStyle>
           <a:p>
             <a:r>
-              <a:rPr lang="en-US" smtClean="0"/>
+              <a:rPr lang="en-US"/>
               <a:t>Click to edit Master subtitle style</a:t>
             </a:r>
-            <a:endParaRPr lang="en-US"/>
           </a:p>
         </p:txBody>
       </p:sp>
@@ -1369,7 +1356,7 @@
           <a:p>
             <a:fld id="{5BCAD085-E8A6-8845-BD4E-CB4CCA059FC4}" type="datetimeFigureOut">
               <a:rPr lang="en-US" smtClean="0"/>
-              <a:t>1/27/13</a:t>
+              <a:t>2/9/2026</a:t>
             </a:fld>
             <a:endParaRPr lang="en-US"/>
           </a:p>
@@ -1463,10 +1450,9 @@
           <a:lstStyle/>
           <a:p>
             <a:r>
-              <a:rPr lang="en-US" smtClean="0"/>
+              <a:rPr lang="en-US"/>
               <a:t>Click to edit Master title style</a:t>
             </a:r>
-            <a:endParaRPr lang="en-US"/>
           </a:p>
         </p:txBody>
       </p:sp>
@@ -1487,38 +1473,37 @@
           <a:p>
             <a:pPr lvl="0"/>
             <a:r>
-              <a:rPr lang="en-US" smtClean="0"/>
+              <a:rPr lang="en-US"/>
               <a:t>Click to edit Master text styles</a:t>
             </a:r>
           </a:p>
           <a:p>
             <a:pPr lvl="1"/>
             <a:r>
-              <a:rPr lang="en-US" smtClean="0"/>
+              <a:rPr lang="en-US"/>
               <a:t>Second level</a:t>
             </a:r>
           </a:p>
           <a:p>
             <a:pPr lvl="2"/>
             <a:r>
-              <a:rPr lang="en-US" smtClean="0"/>
+              <a:rPr lang="en-US"/>
               <a:t>Third level</a:t>
             </a:r>
           </a:p>
           <a:p>
             <a:pPr lvl="3"/>
             <a:r>
-              <a:rPr lang="en-US" smtClean="0"/>
+              <a:rPr lang="en-US"/>
               <a:t>Fourth level</a:t>
             </a:r>
           </a:p>
           <a:p>
             <a:pPr lvl="4"/>
             <a:r>
-              <a:rPr lang="en-US" smtClean="0"/>
+              <a:rPr lang="en-US"/>
               <a:t>Fifth level</a:t>
             </a:r>
-            <a:endParaRPr lang="en-US"/>
           </a:p>
         </p:txBody>
       </p:sp>
@@ -1539,7 +1524,7 @@
           <a:p>
             <a:fld id="{5BCAD085-E8A6-8845-BD4E-CB4CCA059FC4}" type="datetimeFigureOut">
               <a:rPr lang="en-US" smtClean="0"/>
-              <a:t>1/27/13</a:t>
+              <a:t>2/9/2026</a:t>
             </a:fld>
             <a:endParaRPr lang="en-US"/>
           </a:p>
@@ -1638,10 +1623,9 @@
           <a:lstStyle/>
           <a:p>
             <a:r>
-              <a:rPr lang="en-US" smtClean="0"/>
+              <a:rPr lang="en-US"/>
               <a:t>Click to edit Master title style</a:t>
             </a:r>
-            <a:endParaRPr lang="en-US"/>
           </a:p>
         </p:txBody>
       </p:sp>
@@ -1667,38 +1651,37 @@
           <a:p>
             <a:pPr lvl="0"/>
             <a:r>
-              <a:rPr lang="en-US" smtClean="0"/>
+              <a:rPr lang="en-US"/>
               <a:t>Click to edit Master text styles</a:t>
             </a:r>
           </a:p>
           <a:p>
             <a:pPr lvl="1"/>
             <a:r>
-              <a:rPr lang="en-US" smtClean="0"/>
+              <a:rPr lang="en-US"/>
               <a:t>Second level</a:t>
             </a:r>
           </a:p>
           <a:p>
             <a:pPr lvl="2"/>
             <a:r>
-              <a:rPr lang="en-US" smtClean="0"/>
+              <a:rPr lang="en-US"/>
               <a:t>Third level</a:t>
             </a:r>
           </a:p>
           <a:p>
             <a:pPr lvl="3"/>
             <a:r>
-              <a:rPr lang="en-US" smtClean="0"/>
+              <a:rPr lang="en-US"/>
               <a:t>Fourth level</a:t>
             </a:r>
           </a:p>
           <a:p>
             <a:pPr lvl="4"/>
             <a:r>
-              <a:rPr lang="en-US" smtClean="0"/>
+              <a:rPr lang="en-US"/>
               <a:t>Fifth level</a:t>
             </a:r>
-            <a:endParaRPr lang="en-US"/>
           </a:p>
         </p:txBody>
       </p:sp>
@@ -1719,7 +1702,7 @@
           <a:p>
             <a:fld id="{5BCAD085-E8A6-8845-BD4E-CB4CCA059FC4}" type="datetimeFigureOut">
               <a:rPr lang="en-US" smtClean="0"/>
-              <a:t>1/27/13</a:t>
+              <a:t>2/9/2026</a:t>
             </a:fld>
             <a:endParaRPr lang="en-US"/>
           </a:p>
@@ -1813,10 +1796,9 @@
           <a:lstStyle/>
           <a:p>
             <a:r>
-              <a:rPr lang="en-US" smtClean="0"/>
+              <a:rPr lang="en-US"/>
               <a:t>Click to edit Master title style</a:t>
             </a:r>
-            <a:endParaRPr lang="en-US"/>
           </a:p>
         </p:txBody>
       </p:sp>
@@ -1837,38 +1819,37 @@
           <a:p>
             <a:pPr lvl="0"/>
             <a:r>
-              <a:rPr lang="en-US" smtClean="0"/>
+              <a:rPr lang="en-US"/>
               <a:t>Click to edit Master text styles</a:t>
             </a:r>
           </a:p>
           <a:p>
             <a:pPr lvl="1"/>
             <a:r>
-              <a:rPr lang="en-US" smtClean="0"/>
+              <a:rPr lang="en-US"/>
               <a:t>Second level</a:t>
             </a:r>
           </a:p>
           <a:p>
             <a:pPr lvl="2"/>
             <a:r>
-              <a:rPr lang="en-US" smtClean="0"/>
+              <a:rPr lang="en-US"/>
               <a:t>Third level</a:t>
             </a:r>
           </a:p>
           <a:p>
             <a:pPr lvl="3"/>
             <a:r>
-              <a:rPr lang="en-US" smtClean="0"/>
+              <a:rPr lang="en-US"/>
               <a:t>Fourth level</a:t>
             </a:r>
           </a:p>
           <a:p>
             <a:pPr lvl="4"/>
             <a:r>
-              <a:rPr lang="en-US" smtClean="0"/>
+              <a:rPr lang="en-US"/>
               <a:t>Fifth level</a:t>
             </a:r>
-            <a:endParaRPr lang="en-US"/>
           </a:p>
         </p:txBody>
       </p:sp>
@@ -1889,7 +1870,7 @@
           <a:p>
             <a:fld id="{5BCAD085-E8A6-8845-BD4E-CB4CCA059FC4}" type="datetimeFigureOut">
               <a:rPr lang="en-US" smtClean="0"/>
-              <a:t>1/27/13</a:t>
+              <a:t>2/9/2026</a:t>
             </a:fld>
             <a:endParaRPr lang="en-US"/>
           </a:p>
@@ -1992,10 +1973,9 @@
           </a:lstStyle>
           <a:p>
             <a:r>
-              <a:rPr lang="en-US" smtClean="0"/>
+              <a:rPr lang="en-US"/>
               <a:t>Click to edit Master title style</a:t>
             </a:r>
-            <a:endParaRPr lang="en-US"/>
           </a:p>
         </p:txBody>
       </p:sp>
@@ -2112,7 +2092,7 @@
           <a:p>
             <a:pPr lvl="0"/>
             <a:r>
-              <a:rPr lang="en-US" smtClean="0"/>
+              <a:rPr lang="en-US"/>
               <a:t>Click to edit Master text styles</a:t>
             </a:r>
           </a:p>
@@ -2135,7 +2115,7 @@
           <a:p>
             <a:fld id="{5BCAD085-E8A6-8845-BD4E-CB4CCA059FC4}" type="datetimeFigureOut">
               <a:rPr lang="en-US" smtClean="0"/>
-              <a:t>1/27/13</a:t>
+              <a:t>2/9/2026</a:t>
             </a:fld>
             <a:endParaRPr lang="en-US"/>
           </a:p>
@@ -2229,10 +2209,9 @@
           <a:lstStyle/>
           <a:p>
             <a:r>
-              <a:rPr lang="en-US" smtClean="0"/>
+              <a:rPr lang="en-US"/>
               <a:t>Click to edit Master title style</a:t>
             </a:r>
-            <a:endParaRPr lang="en-US"/>
           </a:p>
         </p:txBody>
       </p:sp>
@@ -2286,38 +2265,37 @@
           <a:p>
             <a:pPr lvl="0"/>
             <a:r>
-              <a:rPr lang="en-US" smtClean="0"/>
+              <a:rPr lang="en-US"/>
               <a:t>Click to edit Master text styles</a:t>
             </a:r>
           </a:p>
           <a:p>
             <a:pPr lvl="1"/>
             <a:r>
-              <a:rPr lang="en-US" smtClean="0"/>
+              <a:rPr lang="en-US"/>
               <a:t>Second level</a:t>
             </a:r>
           </a:p>
           <a:p>
             <a:pPr lvl="2"/>
             <a:r>
-              <a:rPr lang="en-US" smtClean="0"/>
+              <a:rPr lang="en-US"/>
               <a:t>Third level</a:t>
             </a:r>
           </a:p>
           <a:p>
             <a:pPr lvl="3"/>
             <a:r>
-              <a:rPr lang="en-US" smtClean="0"/>
+              <a:rPr lang="en-US"/>
               <a:t>Fourth level</a:t>
             </a:r>
           </a:p>
           <a:p>
             <a:pPr lvl="4"/>
             <a:r>
-              <a:rPr lang="en-US" smtClean="0"/>
+              <a:rPr lang="en-US"/>
               <a:t>Fifth level</a:t>
             </a:r>
-            <a:endParaRPr lang="en-US"/>
           </a:p>
         </p:txBody>
       </p:sp>
@@ -2371,38 +2349,37 @@
           <a:p>
             <a:pPr lvl="0"/>
             <a:r>
-              <a:rPr lang="en-US" smtClean="0"/>
+              <a:rPr lang="en-US"/>
               <a:t>Click to edit Master text styles</a:t>
             </a:r>
           </a:p>
           <a:p>
             <a:pPr lvl="1"/>
             <a:r>
-              <a:rPr lang="en-US" smtClean="0"/>
+              <a:rPr lang="en-US"/>
               <a:t>Second level</a:t>
             </a:r>
           </a:p>
           <a:p>
             <a:pPr lvl="2"/>
             <a:r>
-              <a:rPr lang="en-US" smtClean="0"/>
+              <a:rPr lang="en-US"/>
               <a:t>Third level</a:t>
             </a:r>
           </a:p>
           <a:p>
             <a:pPr lvl="3"/>
             <a:r>
-              <a:rPr lang="en-US" smtClean="0"/>
+              <a:rPr lang="en-US"/>
               <a:t>Fourth level</a:t>
             </a:r>
           </a:p>
           <a:p>
             <a:pPr lvl="4"/>
             <a:r>
-              <a:rPr lang="en-US" smtClean="0"/>
+              <a:rPr lang="en-US"/>
               <a:t>Fifth level</a:t>
             </a:r>
-            <a:endParaRPr lang="en-US"/>
           </a:p>
         </p:txBody>
       </p:sp>
@@ -2423,7 +2400,7 @@
           <a:p>
             <a:fld id="{5BCAD085-E8A6-8845-BD4E-CB4CCA059FC4}" type="datetimeFigureOut">
               <a:rPr lang="en-US" smtClean="0"/>
-              <a:t>1/27/13</a:t>
+              <a:t>2/9/2026</a:t>
             </a:fld>
             <a:endParaRPr lang="en-US"/>
           </a:p>
@@ -2521,10 +2498,9 @@
           </a:lstStyle>
           <a:p>
             <a:r>
-              <a:rPr lang="en-US" smtClean="0"/>
+              <a:rPr lang="en-US"/>
               <a:t>Click to edit Master title style</a:t>
             </a:r>
-            <a:endParaRPr lang="en-US"/>
           </a:p>
         </p:txBody>
       </p:sp>
@@ -2587,7 +2563,7 @@
           <a:p>
             <a:pPr lvl="0"/>
             <a:r>
-              <a:rPr lang="en-US" smtClean="0"/>
+              <a:rPr lang="en-US"/>
               <a:t>Click to edit Master text styles</a:t>
             </a:r>
           </a:p>
@@ -2643,38 +2619,37 @@
           <a:p>
             <a:pPr lvl="0"/>
             <a:r>
-              <a:rPr lang="en-US" smtClean="0"/>
+              <a:rPr lang="en-US"/>
               <a:t>Click to edit Master text styles</a:t>
             </a:r>
           </a:p>
           <a:p>
             <a:pPr lvl="1"/>
             <a:r>
-              <a:rPr lang="en-US" smtClean="0"/>
+              <a:rPr lang="en-US"/>
               <a:t>Second level</a:t>
             </a:r>
           </a:p>
           <a:p>
             <a:pPr lvl="2"/>
             <a:r>
-              <a:rPr lang="en-US" smtClean="0"/>
+              <a:rPr lang="en-US"/>
               <a:t>Third level</a:t>
             </a:r>
           </a:p>
           <a:p>
             <a:pPr lvl="3"/>
             <a:r>
-              <a:rPr lang="en-US" smtClean="0"/>
+              <a:rPr lang="en-US"/>
               <a:t>Fourth level</a:t>
             </a:r>
           </a:p>
           <a:p>
             <a:pPr lvl="4"/>
             <a:r>
-              <a:rPr lang="en-US" smtClean="0"/>
+              <a:rPr lang="en-US"/>
               <a:t>Fifth level</a:t>
             </a:r>
-            <a:endParaRPr lang="en-US"/>
           </a:p>
         </p:txBody>
       </p:sp>
@@ -2737,7 +2712,7 @@
           <a:p>
             <a:pPr lvl="0"/>
             <a:r>
-              <a:rPr lang="en-US" smtClean="0"/>
+              <a:rPr lang="en-US"/>
               <a:t>Click to edit Master text styles</a:t>
             </a:r>
           </a:p>
@@ -2793,38 +2768,37 @@
           <a:p>
             <a:pPr lvl="0"/>
             <a:r>
-              <a:rPr lang="en-US" smtClean="0"/>
+              <a:rPr lang="en-US"/>
               <a:t>Click to edit Master text styles</a:t>
             </a:r>
           </a:p>
           <a:p>
             <a:pPr lvl="1"/>
             <a:r>
-              <a:rPr lang="en-US" smtClean="0"/>
+              <a:rPr lang="en-US"/>
               <a:t>Second level</a:t>
             </a:r>
           </a:p>
           <a:p>
             <a:pPr lvl="2"/>
             <a:r>
-              <a:rPr lang="en-US" smtClean="0"/>
+              <a:rPr lang="en-US"/>
               <a:t>Third level</a:t>
             </a:r>
           </a:p>
           <a:p>
             <a:pPr lvl="3"/>
             <a:r>
-              <a:rPr lang="en-US" smtClean="0"/>
+              <a:rPr lang="en-US"/>
               <a:t>Fourth level</a:t>
             </a:r>
           </a:p>
           <a:p>
             <a:pPr lvl="4"/>
             <a:r>
-              <a:rPr lang="en-US" smtClean="0"/>
+              <a:rPr lang="en-US"/>
               <a:t>Fifth level</a:t>
             </a:r>
-            <a:endParaRPr lang="en-US"/>
           </a:p>
         </p:txBody>
       </p:sp>
@@ -2845,7 +2819,7 @@
           <a:p>
             <a:fld id="{5BCAD085-E8A6-8845-BD4E-CB4CCA059FC4}" type="datetimeFigureOut">
               <a:rPr lang="en-US" smtClean="0"/>
-              <a:t>1/27/13</a:t>
+              <a:t>2/9/2026</a:t>
             </a:fld>
             <a:endParaRPr lang="en-US"/>
           </a:p>
@@ -2939,10 +2913,9 @@
           <a:lstStyle/>
           <a:p>
             <a:r>
-              <a:rPr lang="en-US" smtClean="0"/>
+              <a:rPr lang="en-US"/>
               <a:t>Click to edit Master title style</a:t>
             </a:r>
-            <a:endParaRPr lang="en-US"/>
           </a:p>
         </p:txBody>
       </p:sp>
@@ -2963,7 +2936,7 @@
           <a:p>
             <a:fld id="{5BCAD085-E8A6-8845-BD4E-CB4CCA059FC4}" type="datetimeFigureOut">
               <a:rPr lang="en-US" smtClean="0"/>
-              <a:t>1/27/13</a:t>
+              <a:t>2/9/2026</a:t>
             </a:fld>
             <a:endParaRPr lang="en-US"/>
           </a:p>
@@ -3058,7 +3031,7 @@
           <a:p>
             <a:fld id="{5BCAD085-E8A6-8845-BD4E-CB4CCA059FC4}" type="datetimeFigureOut">
               <a:rPr lang="en-US" smtClean="0"/>
-              <a:t>1/27/13</a:t>
+              <a:t>2/9/2026</a:t>
             </a:fld>
             <a:endParaRPr lang="en-US"/>
           </a:p>
@@ -3161,10 +3134,9 @@
           </a:lstStyle>
           <a:p>
             <a:r>
-              <a:rPr lang="en-US" smtClean="0"/>
+              <a:rPr lang="en-US"/>
               <a:t>Click to edit Master title style</a:t>
             </a:r>
-            <a:endParaRPr lang="en-US"/>
           </a:p>
         </p:txBody>
       </p:sp>
@@ -3218,38 +3190,37 @@
           <a:p>
             <a:pPr lvl="0"/>
             <a:r>
-              <a:rPr lang="en-US" smtClean="0"/>
+              <a:rPr lang="en-US"/>
               <a:t>Click to edit Master text styles</a:t>
             </a:r>
           </a:p>
           <a:p>
             <a:pPr lvl="1"/>
             <a:r>
-              <a:rPr lang="en-US" smtClean="0"/>
+              <a:rPr lang="en-US"/>
               <a:t>Second level</a:t>
             </a:r>
           </a:p>
           <a:p>
             <a:pPr lvl="2"/>
             <a:r>
-              <a:rPr lang="en-US" smtClean="0"/>
+              <a:rPr lang="en-US"/>
               <a:t>Third level</a:t>
             </a:r>
           </a:p>
           <a:p>
             <a:pPr lvl="3"/>
             <a:r>
-              <a:rPr lang="en-US" smtClean="0"/>
+              <a:rPr lang="en-US"/>
               <a:t>Fourth level</a:t>
             </a:r>
           </a:p>
           <a:p>
             <a:pPr lvl="4"/>
             <a:r>
-              <a:rPr lang="en-US" smtClean="0"/>
+              <a:rPr lang="en-US"/>
               <a:t>Fifth level</a:t>
             </a:r>
-            <a:endParaRPr lang="en-US"/>
           </a:p>
         </p:txBody>
       </p:sp>
@@ -3312,7 +3283,7 @@
           <a:p>
             <a:pPr lvl="0"/>
             <a:r>
-              <a:rPr lang="en-US" smtClean="0"/>
+              <a:rPr lang="en-US"/>
               <a:t>Click to edit Master text styles</a:t>
             </a:r>
           </a:p>
@@ -3335,7 +3306,7 @@
           <a:p>
             <a:fld id="{5BCAD085-E8A6-8845-BD4E-CB4CCA059FC4}" type="datetimeFigureOut">
               <a:rPr lang="en-US" smtClean="0"/>
-              <a:t>1/27/13</a:t>
+              <a:t>2/9/2026</a:t>
             </a:fld>
             <a:endParaRPr lang="en-US"/>
           </a:p>
@@ -3438,10 +3409,9 @@
           </a:lstStyle>
           <a:p>
             <a:r>
-              <a:rPr lang="en-US" smtClean="0"/>
+              <a:rPr lang="en-US"/>
               <a:t>Click to edit Master title style</a:t>
             </a:r>
-            <a:endParaRPr lang="en-US"/>
           </a:p>
         </p:txBody>
       </p:sp>
@@ -3565,7 +3535,7 @@
           <a:p>
             <a:pPr lvl="0"/>
             <a:r>
-              <a:rPr lang="en-US" smtClean="0"/>
+              <a:rPr lang="en-US"/>
               <a:t>Click to edit Master text styles</a:t>
             </a:r>
           </a:p>
@@ -3588,7 +3558,7 @@
           <a:p>
             <a:fld id="{5BCAD085-E8A6-8845-BD4E-CB4CCA059FC4}" type="datetimeFigureOut">
               <a:rPr lang="en-US" smtClean="0"/>
-              <a:t>1/27/13</a:t>
+              <a:t>2/9/2026</a:t>
             </a:fld>
             <a:endParaRPr lang="en-US"/>
           </a:p>
@@ -3697,10 +3667,9 @@
           <a:lstStyle/>
           <a:p>
             <a:r>
-              <a:rPr lang="en-US" smtClean="0"/>
+              <a:rPr lang="en-US"/>
               <a:t>Click to edit Master title style</a:t>
             </a:r>
-            <a:endParaRPr lang="en-US"/>
           </a:p>
         </p:txBody>
       </p:sp>
@@ -3731,38 +3700,37 @@
           <a:p>
             <a:pPr lvl="0"/>
             <a:r>
-              <a:rPr lang="en-US" smtClean="0"/>
+              <a:rPr lang="en-US"/>
               <a:t>Click to edit Master text styles</a:t>
             </a:r>
           </a:p>
           <a:p>
             <a:pPr lvl="1"/>
             <a:r>
-              <a:rPr lang="en-US" smtClean="0"/>
+              <a:rPr lang="en-US"/>
               <a:t>Second level</a:t>
             </a:r>
           </a:p>
           <a:p>
             <a:pPr lvl="2"/>
             <a:r>
-              <a:rPr lang="en-US" smtClean="0"/>
+              <a:rPr lang="en-US"/>
               <a:t>Third level</a:t>
             </a:r>
           </a:p>
           <a:p>
             <a:pPr lvl="3"/>
             <a:r>
-              <a:rPr lang="en-US" smtClean="0"/>
+              <a:rPr lang="en-US"/>
               <a:t>Fourth level</a:t>
             </a:r>
           </a:p>
           <a:p>
             <a:pPr lvl="4"/>
             <a:r>
-              <a:rPr lang="en-US" smtClean="0"/>
+              <a:rPr lang="en-US"/>
               <a:t>Fifth level</a:t>
             </a:r>
-            <a:endParaRPr lang="en-US"/>
           </a:p>
         </p:txBody>
       </p:sp>
@@ -3801,7 +3769,7 @@
           <a:p>
             <a:fld id="{5BCAD085-E8A6-8845-BD4E-CB4CCA059FC4}" type="datetimeFigureOut">
               <a:rPr lang="en-US" smtClean="0"/>
-              <a:t>1/27/13</a:t>
+              <a:t>2/9/2026</a:t>
             </a:fld>
             <a:endParaRPr lang="en-US"/>
           </a:p>
@@ -4160,7 +4128,7 @@
 </file>
 
 <file path=ppt/slides/slide1.xml><?xml version="1.0" encoding="utf-8"?>
-<p:sld xmlns:a="http://schemas.openxmlformats.org/drawingml/2006/main" xmlns:p="http://schemas.openxmlformats.org/presentationml/2006/main" xmlns:r="http://schemas.openxmlformats.org/officeDocument/2006/relationships">
+<p:sld xmlns:a="http://schemas.openxmlformats.org/drawingml/2006/main" xmlns:r="http://schemas.openxmlformats.org/officeDocument/2006/relationships" xmlns:p="http://schemas.openxmlformats.org/presentationml/2006/main">
   <p:cSld>
     <p:spTree>
       <p:nvGrpSpPr>
@@ -4168,7 +4136,14 @@
         <p:cNvGrpSpPr/>
         <p:nvPr/>
       </p:nvGrpSpPr>
-      <p:grpSpPr/>
+      <p:grpSpPr>
+        <a:xfrm>
+          <a:off x="0" y="0"/>
+          <a:ext cx="0" cy="0"/>
+          <a:chOff x="0" y="0"/>
+          <a:chExt cx="0" cy="0"/>
+        </a:xfrm>
+      </p:grpSpPr>
       <p:sp>
         <p:nvSpPr>
           <p:cNvPr id="2" name="Title 1"/>
@@ -4239,7 +4214,7 @@
 </file>
 
 <file path=ppt/slides/slide10.xml><?xml version="1.0" encoding="utf-8"?>
-<p:sld xmlns:a="http://schemas.openxmlformats.org/drawingml/2006/main" xmlns:p="http://schemas.openxmlformats.org/presentationml/2006/main" xmlns:r="http://schemas.openxmlformats.org/officeDocument/2006/relationships">
+<p:sld xmlns:a="http://schemas.openxmlformats.org/drawingml/2006/main" xmlns:r="http://schemas.openxmlformats.org/officeDocument/2006/relationships" xmlns:p="http://schemas.openxmlformats.org/presentationml/2006/main">
   <p:cSld>
     <p:spTree>
       <p:nvGrpSpPr>
@@ -4247,7 +4222,14 @@
         <p:cNvGrpSpPr/>
         <p:nvPr/>
       </p:nvGrpSpPr>
-      <p:grpSpPr/>
+      <p:grpSpPr>
+        <a:xfrm>
+          <a:off x="0" y="0"/>
+          <a:ext cx="0" cy="0"/>
+          <a:chOff x="0" y="0"/>
+          <a:chExt cx="0" cy="0"/>
+        </a:xfrm>
+      </p:grpSpPr>
       <p:sp>
         <p:nvSpPr>
           <p:cNvPr id="2" name="Title 1"/>
@@ -4260,11 +4242,18 @@
         </p:nvSpPr>
         <p:spPr/>
         <p:txBody>
-          <a:bodyPr/>
-          <a:lstStyle/>
-          <a:p>
-            <a:r>
-              <a:t>The transfer: Kubernetes mapping (10 minutes max)</a:t>
+          <a:bodyPr>
+            <a:normAutofit fontScale="90000"/>
+          </a:bodyPr>
+          <a:lstStyle/>
+          <a:p>
+            <a:r>
+              <a:rPr lang="en-GB" dirty="0"/>
+              <a:t>Optional</a:t>
+            </a:r>
+            <a:r>
+              <a:rPr dirty="0"/>
+              <a:t>: Kubernetes mapping (10 minutes max)</a:t>
             </a:r>
           </a:p>
         </p:txBody>
@@ -4342,7 +4331,7 @@
 </file>
 
 <file path=ppt/slides/slide11.xml><?xml version="1.0" encoding="utf-8"?>
-<p:sld xmlns:a="http://schemas.openxmlformats.org/drawingml/2006/main" xmlns:p="http://schemas.openxmlformats.org/presentationml/2006/main" xmlns:r="http://schemas.openxmlformats.org/officeDocument/2006/relationships">
+<p:sld xmlns:a="http://schemas.openxmlformats.org/drawingml/2006/main" xmlns:r="http://schemas.openxmlformats.org/officeDocument/2006/relationships" xmlns:p="http://schemas.openxmlformats.org/presentationml/2006/main">
   <p:cSld>
     <p:spTree>
       <p:nvGrpSpPr>
@@ -4350,7 +4339,14 @@
         <p:cNvGrpSpPr/>
         <p:nvPr/>
       </p:nvGrpSpPr>
-      <p:grpSpPr/>
+      <p:grpSpPr>
+        <a:xfrm>
+          <a:off x="0" y="0"/>
+          <a:ext cx="0" cy="0"/>
+          <a:chOff x="0" y="0"/>
+          <a:chExt cx="0" cy="0"/>
+        </a:xfrm>
+      </p:grpSpPr>
       <p:sp>
         <p:nvSpPr>
           <p:cNvPr id="2" name="Title 1"/>
@@ -4363,11 +4359,18 @@
         </p:nvSpPr>
         <p:spPr/>
         <p:txBody>
-          <a:bodyPr/>
-          <a:lstStyle/>
-          <a:p>
-            <a:r>
-              <a:t>Close: what to screenshot for portfolio</a:t>
+          <a:bodyPr>
+            <a:normAutofit fontScale="90000"/>
+          </a:bodyPr>
+          <a:lstStyle/>
+          <a:p>
+            <a:r>
+              <a:rPr lang="en-GB" dirty="0"/>
+              <a:t>What you could </a:t>
+            </a:r>
+            <a:r>
+              <a:rPr dirty="0"/>
+              <a:t>screenshot for portfolio</a:t>
             </a:r>
           </a:p>
         </p:txBody>
@@ -4387,11 +4390,30 @@
           <a:bodyPr/>
           <a:lstStyle/>
           <a:p>
+            <a:pPr marL="0" indent="0">
+              <a:buNone/>
+              <a:defRPr sz="1800"/>
+            </a:pPr>
+            <a:r>
+              <a:rPr dirty="0"/>
+              <a:t>Learners </a:t>
+            </a:r>
+            <a:r>
+              <a:rPr lang="en-GB" dirty="0"/>
+              <a:t>could </a:t>
+            </a:r>
+            <a:r>
+              <a:rPr dirty="0"/>
+              <a:t>capture 3 pieces of evidence:</a:t>
+            </a:r>
+          </a:p>
+          <a:p>
             <a:pPr>
               <a:defRPr sz="1800"/>
             </a:pPr>
             <a:r>
-              <a:t>Learners capture 3 pieces of evidence:</a:t>
+              <a:rPr dirty="0"/>
+              <a:t>1) A dashboard showing throttles *before* and *after*</a:t>
             </a:r>
           </a:p>
           <a:p>
@@ -4399,7 +4421,8 @@
               <a:defRPr sz="1800"/>
             </a:pPr>
             <a:r>
-              <a:t>1) A dashboard showing throttles *before* and *after*</a:t>
+              <a:rPr dirty="0"/>
+              <a:t>2) A Step Functions execution showing failure (red) and success (green)</a:t>
             </a:r>
           </a:p>
           <a:p>
@@ -4407,14 +4430,7 @@
               <a:defRPr sz="1800"/>
             </a:pPr>
             <a:r>
-              <a:t>2) A Step Functions execution showing failure (red) and success (green)</a:t>
-            </a:r>
-          </a:p>
-          <a:p>
-            <a:pPr>
-              <a:defRPr sz="1800"/>
-            </a:pPr>
-            <a:r>
+              <a:rPr dirty="0"/>
               <a:t>3) One sentence explaining “what we scaled” and why</a:t>
             </a:r>
           </a:p>
@@ -4429,7 +4445,7 @@
 </file>
 
 <file path=ppt/slides/slide12.xml><?xml version="1.0" encoding="utf-8"?>
-<p:sld xmlns:a="http://schemas.openxmlformats.org/drawingml/2006/main" xmlns:p="http://schemas.openxmlformats.org/presentationml/2006/main" xmlns:r="http://schemas.openxmlformats.org/officeDocument/2006/relationships">
+<p:sld xmlns:a="http://schemas.openxmlformats.org/drawingml/2006/main" xmlns:r="http://schemas.openxmlformats.org/officeDocument/2006/relationships" xmlns:p="http://schemas.openxmlformats.org/presentationml/2006/main">
   <p:cSld>
     <p:spTree>
       <p:nvGrpSpPr>
@@ -4437,7 +4453,14 @@
         <p:cNvGrpSpPr/>
         <p:nvPr/>
       </p:nvGrpSpPr>
-      <p:grpSpPr/>
+      <p:grpSpPr>
+        <a:xfrm>
+          <a:off x="0" y="0"/>
+          <a:ext cx="0" cy="0"/>
+          <a:chOff x="0" y="0"/>
+          <a:chExt cx="0" cy="0"/>
+        </a:xfrm>
+      </p:grpSpPr>
       <p:sp>
         <p:nvSpPr>
           <p:cNvPr id="2" name="Title 1"/>
@@ -4478,7 +4501,8 @@
               <a:defRPr sz="1800"/>
             </a:pPr>
             <a:r>
-              <a:t>Run:</a:t>
+              <a:rPr lang="en-GB" dirty="0"/>
+              <a:t>In a real environment it’s always good to do the clean-up</a:t>
             </a:r>
           </a:p>
           <a:p>
@@ -4486,6 +4510,36 @@
               <a:defRPr sz="1800"/>
             </a:pPr>
             <a:r>
+              <a:rPr lang="en-GB" dirty="0"/>
+              <a:t>Read the file contents to </a:t>
+            </a:r>
+            <a:r>
+              <a:rPr lang="en-GB"/>
+              <a:t>see what it does </a:t>
+            </a:r>
+            <a:r>
+              <a:rPr lang="en-GB" dirty="0"/>
+              <a:t>and then </a:t>
+            </a:r>
+            <a:r>
+              <a:rPr dirty="0"/>
+              <a:t>Run</a:t>
+            </a:r>
+            <a:r>
+              <a:rPr lang="en-GB" dirty="0"/>
+              <a:t> this script</a:t>
+            </a:r>
+            <a:r>
+              <a:rPr dirty="0"/>
+              <a:t>:</a:t>
+            </a:r>
+          </a:p>
+          <a:p>
+            <a:pPr lvl="1">
+              <a:defRPr sz="1800"/>
+            </a:pPr>
+            <a:r>
+              <a:rPr dirty="0"/>
               <a:t>`./scripts/99_cleanup.sh`</a:t>
             </a:r>
           </a:p>
@@ -4500,7 +4554,7 @@
 </file>
 
 <file path=ppt/slides/slide2.xml><?xml version="1.0" encoding="utf-8"?>
-<p:sld xmlns:a="http://schemas.openxmlformats.org/drawingml/2006/main" xmlns:p="http://schemas.openxmlformats.org/presentationml/2006/main" xmlns:r="http://schemas.openxmlformats.org/officeDocument/2006/relationships">
+<p:sld xmlns:a="http://schemas.openxmlformats.org/drawingml/2006/main" xmlns:r="http://schemas.openxmlformats.org/officeDocument/2006/relationships" xmlns:p="http://schemas.openxmlformats.org/presentationml/2006/main">
   <p:cSld>
     <p:spTree>
       <p:nvGrpSpPr>
@@ -4508,7 +4562,14 @@
         <p:cNvGrpSpPr/>
         <p:nvPr/>
       </p:nvGrpSpPr>
-      <p:grpSpPr/>
+      <p:grpSpPr>
+        <a:xfrm>
+          <a:off x="0" y="0"/>
+          <a:ext cx="0" cy="0"/>
+          <a:chOff x="0" y="0"/>
+          <a:chExt cx="0" cy="0"/>
+        </a:xfrm>
+      </p:grpSpPr>
       <p:sp>
         <p:nvSpPr>
           <p:cNvPr id="2" name="Title 1"/>
@@ -4542,45 +4603,52 @@
         </p:nvSpPr>
         <p:spPr/>
         <p:txBody>
-          <a:bodyPr/>
+          <a:bodyPr>
+            <a:normAutofit/>
+          </a:bodyPr>
           <a:lstStyle/>
           <a:p>
             <a:pPr>
               <a:defRPr sz="1800"/>
             </a:pPr>
             <a:r>
+              <a:rPr sz="2400" dirty="0"/>
               <a:t>Orchestration is how we:</a:t>
             </a:r>
           </a:p>
           <a:p>
-            <a:pPr>
-              <a:defRPr sz="1800"/>
-            </a:pPr>
-            <a:r>
+            <a:pPr lvl="1">
+              <a:defRPr sz="1800"/>
+            </a:pPr>
+            <a:r>
+              <a:rPr sz="2400" dirty="0"/>
               <a:t>split work into steps</a:t>
             </a:r>
           </a:p>
           <a:p>
-            <a:pPr>
-              <a:defRPr sz="1800"/>
-            </a:pPr>
-            <a:r>
+            <a:pPr lvl="1">
+              <a:defRPr sz="1800"/>
+            </a:pPr>
+            <a:r>
+              <a:rPr sz="2400" dirty="0"/>
               <a:t>apply retries/backoff</a:t>
             </a:r>
           </a:p>
           <a:p>
-            <a:pPr>
-              <a:defRPr sz="1800"/>
-            </a:pPr>
-            <a:r>
+            <a:pPr lvl="1">
+              <a:defRPr sz="1800"/>
+            </a:pPr>
+            <a:r>
+              <a:rPr sz="2400" dirty="0"/>
               <a:t>apply timeouts</a:t>
             </a:r>
           </a:p>
           <a:p>
-            <a:pPr>
-              <a:defRPr sz="1800"/>
-            </a:pPr>
-            <a:r>
+            <a:pPr lvl="1">
+              <a:defRPr sz="1800"/>
+            </a:pPr>
+            <a:r>
+              <a:rPr sz="2400" dirty="0"/>
               <a:t>see *where time is spent*</a:t>
             </a:r>
           </a:p>
@@ -4595,7 +4663,7 @@
 </file>
 
 <file path=ppt/slides/slide3.xml><?xml version="1.0" encoding="utf-8"?>
-<p:sld xmlns:a="http://schemas.openxmlformats.org/drawingml/2006/main" xmlns:p="http://schemas.openxmlformats.org/presentationml/2006/main" xmlns:r="http://schemas.openxmlformats.org/officeDocument/2006/relationships">
+<p:sld xmlns:a="http://schemas.openxmlformats.org/drawingml/2006/main" xmlns:r="http://schemas.openxmlformats.org/officeDocument/2006/relationships" xmlns:p="http://schemas.openxmlformats.org/presentationml/2006/main">
   <p:cSld>
     <p:spTree>
       <p:nvGrpSpPr>
@@ -4603,7 +4671,14 @@
         <p:cNvGrpSpPr/>
         <p:nvPr/>
       </p:nvGrpSpPr>
-      <p:grpSpPr/>
+      <p:grpSpPr>
+        <a:xfrm>
+          <a:off x="0" y="0"/>
+          <a:ext cx="0" cy="0"/>
+          <a:chOff x="0" y="0"/>
+          <a:chExt cx="0" cy="0"/>
+        </a:xfrm>
+      </p:grpSpPr>
       <p:sp>
         <p:nvSpPr>
           <p:cNvPr id="2" name="Title 1"/>
@@ -4644,7 +4719,12 @@
               <a:defRPr sz="1800"/>
             </a:pPr>
             <a:r>
-              <a:t>RCA is not “being clever”.</a:t>
+              <a:rPr lang="en-GB" dirty="0"/>
+              <a:t>Root Cause Analysis</a:t>
+            </a:r>
+            <a:r>
+              <a:rPr dirty="0"/>
+              <a:t> is not “being clever”</a:t>
             </a:r>
           </a:p>
           <a:p>
@@ -4652,30 +4732,34 @@
               <a:defRPr sz="1800"/>
             </a:pPr>
             <a:r>
+              <a:rPr dirty="0"/>
               <a:t>RCA is:</a:t>
             </a:r>
           </a:p>
           <a:p>
-            <a:pPr>
-              <a:defRPr sz="1800"/>
-            </a:pPr>
-            <a:r>
+            <a:pPr lvl="1">
+              <a:defRPr sz="1800"/>
+            </a:pPr>
+            <a:r>
+              <a:rPr dirty="0"/>
               <a:t>1) Get evidence</a:t>
             </a:r>
           </a:p>
           <a:p>
-            <a:pPr>
-              <a:defRPr sz="1800"/>
-            </a:pPr>
-            <a:r>
+            <a:pPr lvl="1">
+              <a:defRPr sz="1800"/>
+            </a:pPr>
+            <a:r>
+              <a:rPr dirty="0"/>
               <a:t>2) Classify the bottleneck</a:t>
             </a:r>
           </a:p>
           <a:p>
-            <a:pPr>
-              <a:defRPr sz="1800"/>
-            </a:pPr>
-            <a:r>
+            <a:pPr lvl="1">
+              <a:defRPr sz="1800"/>
+            </a:pPr>
+            <a:r>
+              <a:rPr dirty="0"/>
               <a:t>3) Pick the first safe action</a:t>
             </a:r>
           </a:p>
@@ -4690,7 +4774,7 @@
 </file>
 
 <file path=ppt/slides/slide4.xml><?xml version="1.0" encoding="utf-8"?>
-<p:sld xmlns:a="http://schemas.openxmlformats.org/drawingml/2006/main" xmlns:p="http://schemas.openxmlformats.org/presentationml/2006/main" xmlns:r="http://schemas.openxmlformats.org/officeDocument/2006/relationships">
+<p:sld xmlns:a="http://schemas.openxmlformats.org/drawingml/2006/main" xmlns:r="http://schemas.openxmlformats.org/officeDocument/2006/relationships" xmlns:p="http://schemas.openxmlformats.org/presentationml/2006/main">
   <p:cSld>
     <p:spTree>
       <p:nvGrpSpPr>
@@ -4698,7 +4782,14 @@
         <p:cNvGrpSpPr/>
         <p:nvPr/>
       </p:nvGrpSpPr>
-      <p:grpSpPr/>
+      <p:grpSpPr>
+        <a:xfrm>
+          <a:off x="0" y="0"/>
+          <a:ext cx="0" cy="0"/>
+          <a:chOff x="0" y="0"/>
+          <a:chExt cx="0" cy="0"/>
+        </a:xfrm>
+      </p:grpSpPr>
       <p:sp>
         <p:nvSpPr>
           <p:cNvPr id="2" name="Title 1"/>
@@ -4739,38 +4830,43 @@
               <a:defRPr sz="1800"/>
             </a:pPr>
             <a:r>
+              <a:rPr dirty="0"/>
               <a:t>When a pipeline doesn’t scale, it is usually:</a:t>
             </a:r>
           </a:p>
           <a:p>
-            <a:pPr>
-              <a:defRPr sz="1800"/>
-            </a:pPr>
-            <a:r>
+            <a:pPr lvl="1">
+              <a:defRPr sz="1800"/>
+            </a:pPr>
+            <a:r>
+              <a:rPr dirty="0"/>
               <a:t>1) Throttled (hard limit / concurrency / quota)</a:t>
             </a:r>
           </a:p>
           <a:p>
-            <a:pPr>
-              <a:defRPr sz="1800"/>
-            </a:pPr>
-            <a:r>
+            <a:pPr lvl="1">
+              <a:defRPr sz="1800"/>
+            </a:pPr>
+            <a:r>
+              <a:rPr dirty="0"/>
               <a:t>2) Exhausted (CPU/memory per request)</a:t>
             </a:r>
           </a:p>
           <a:p>
-            <a:pPr>
-              <a:defRPr sz="1800"/>
-            </a:pPr>
-            <a:r>
+            <a:pPr lvl="1">
+              <a:defRPr sz="1800"/>
+            </a:pPr>
+            <a:r>
+              <a:rPr dirty="0"/>
               <a:t>3) Timed out (slow dependency / queue/backlog)</a:t>
             </a:r>
           </a:p>
           <a:p>
-            <a:pPr>
-              <a:defRPr sz="1800"/>
-            </a:pPr>
-            <a:r>
+            <a:pPr lvl="1">
+              <a:defRPr sz="1800"/>
+            </a:pPr>
+            <a:r>
+              <a:rPr dirty="0"/>
               <a:t>4) Bad input (payload/schema)</a:t>
             </a:r>
           </a:p>
@@ -4785,7 +4881,7 @@
 </file>
 
 <file path=ppt/slides/slide5.xml><?xml version="1.0" encoding="utf-8"?>
-<p:sld xmlns:a="http://schemas.openxmlformats.org/drawingml/2006/main" xmlns:p="http://schemas.openxmlformats.org/presentationml/2006/main" xmlns:r="http://schemas.openxmlformats.org/officeDocument/2006/relationships">
+<p:sld xmlns:a="http://schemas.openxmlformats.org/drawingml/2006/main" xmlns:r="http://schemas.openxmlformats.org/officeDocument/2006/relationships" xmlns:p="http://schemas.openxmlformats.org/presentationml/2006/main">
   <p:cSld>
     <p:spTree>
       <p:nvGrpSpPr>
@@ -4793,7 +4889,14 @@
         <p:cNvGrpSpPr/>
         <p:nvPr/>
       </p:nvGrpSpPr>
-      <p:grpSpPr/>
+      <p:grpSpPr>
+        <a:xfrm>
+          <a:off x="0" y="0"/>
+          <a:ext cx="0" cy="0"/>
+          <a:chOff x="0" y="0"/>
+          <a:chExt cx="0" cy="0"/>
+        </a:xfrm>
+      </p:grpSpPr>
       <p:sp>
         <p:nvSpPr>
           <p:cNvPr id="2" name="Title 1"/>
@@ -4830,11 +4933,39 @@
           <a:bodyPr/>
           <a:lstStyle/>
           <a:p>
+            <a:pPr marL="0" indent="0">
+              <a:buNone/>
+              <a:defRPr sz="1800"/>
+            </a:pPr>
+            <a:r>
+              <a:rPr dirty="0"/>
+              <a:t>Run:</a:t>
+            </a:r>
+          </a:p>
+          <a:p>
             <a:pPr>
               <a:defRPr sz="1800"/>
             </a:pPr>
             <a:r>
-              <a:t>Run:</a:t>
+              <a:rPr dirty="0"/>
+              <a:t>`./scripts/05_trigger_bad_input.sh`</a:t>
+            </a:r>
+          </a:p>
+          <a:p>
+            <a:pPr marL="0" indent="0">
+              <a:buNone/>
+              <a:defRPr sz="1800"/>
+            </a:pPr>
+            <a:endParaRPr lang="en-GB" dirty="0"/>
+          </a:p>
+          <a:p>
+            <a:pPr marL="0" indent="0">
+              <a:buNone/>
+              <a:defRPr sz="1800"/>
+            </a:pPr>
+            <a:r>
+              <a:rPr dirty="0"/>
+              <a:t>Learners check:</a:t>
             </a:r>
           </a:p>
           <a:p>
@@ -4842,7 +4973,8 @@
               <a:defRPr sz="1800"/>
             </a:pPr>
             <a:r>
-              <a:t>`./scripts/05_trigger_bad_input.sh`</a:t>
+              <a:rPr dirty="0"/>
+              <a:t>Step Functions execution error message:</a:t>
             </a:r>
           </a:p>
           <a:p>
@@ -4850,7 +4982,33 @@
               <a:defRPr sz="1800"/>
             </a:pPr>
             <a:r>
-              <a:t>Learners check:</a:t>
+              <a:rPr dirty="0"/>
+              <a:t>`</a:t>
+            </a:r>
+            <a:r>
+              <a:rPr dirty="0" err="1"/>
+              <a:t>PayloadTooLarge</a:t>
+            </a:r>
+            <a:r>
+              <a:rPr dirty="0"/>
+              <a:t>`</a:t>
+            </a:r>
+          </a:p>
+          <a:p>
+            <a:pPr marL="0" indent="0">
+              <a:buNone/>
+              <a:defRPr sz="1800"/>
+            </a:pPr>
+            <a:endParaRPr lang="en-GB" dirty="0"/>
+          </a:p>
+          <a:p>
+            <a:pPr marL="0" indent="0">
+              <a:buNone/>
+              <a:defRPr sz="1800"/>
+            </a:pPr>
+            <a:r>
+              <a:rPr dirty="0"/>
+              <a:t>Classification:</a:t>
             </a:r>
           </a:p>
           <a:p>
@@ -4858,7 +5016,25 @@
               <a:defRPr sz="1800"/>
             </a:pPr>
             <a:r>
-              <a:t>Step Functions execution error message:</a:t>
+              <a:rPr dirty="0"/>
+              <a:t>Bad input</a:t>
+            </a:r>
+          </a:p>
+          <a:p>
+            <a:pPr marL="0" indent="0">
+              <a:buNone/>
+              <a:defRPr sz="1800"/>
+            </a:pPr>
+            <a:endParaRPr lang="en-GB" dirty="0"/>
+          </a:p>
+          <a:p>
+            <a:pPr marL="0" indent="0">
+              <a:buNone/>
+              <a:defRPr sz="1800"/>
+            </a:pPr>
+            <a:r>
+              <a:rPr dirty="0"/>
+              <a:t>First action:</a:t>
             </a:r>
           </a:p>
           <a:p>
@@ -4866,38 +5042,7 @@
               <a:defRPr sz="1800"/>
             </a:pPr>
             <a:r>
-              <a:t>`PayloadTooLarge`</a:t>
-            </a:r>
-          </a:p>
-          <a:p>
-            <a:pPr>
-              <a:defRPr sz="1800"/>
-            </a:pPr>
-            <a:r>
-              <a:t>Classification:</a:t>
-            </a:r>
-          </a:p>
-          <a:p>
-            <a:pPr>
-              <a:defRPr sz="1800"/>
-            </a:pPr>
-            <a:r>
-              <a:t>Bad input</a:t>
-            </a:r>
-          </a:p>
-          <a:p>
-            <a:pPr>
-              <a:defRPr sz="1800"/>
-            </a:pPr>
-            <a:r>
-              <a:t>First action:</a:t>
-            </a:r>
-          </a:p>
-          <a:p>
-            <a:pPr>
-              <a:defRPr sz="1800"/>
-            </a:pPr>
-            <a:r>
+              <a:rPr dirty="0"/>
               <a:t>Add validation / reject early / cap payloads (already in preprocess)</a:t>
             </a:r>
           </a:p>
@@ -4912,7 +5057,7 @@
 </file>
 
 <file path=ppt/slides/slide6.xml><?xml version="1.0" encoding="utf-8"?>
-<p:sld xmlns:a="http://schemas.openxmlformats.org/drawingml/2006/main" xmlns:p="http://schemas.openxmlformats.org/presentationml/2006/main" xmlns:r="http://schemas.openxmlformats.org/officeDocument/2006/relationships">
+<p:sld xmlns:a="http://schemas.openxmlformats.org/drawingml/2006/main" xmlns:r="http://schemas.openxmlformats.org/officeDocument/2006/relationships" xmlns:p="http://schemas.openxmlformats.org/presentationml/2006/main">
   <p:cSld>
     <p:spTree>
       <p:nvGrpSpPr>
@@ -4920,7 +5065,14 @@
         <p:cNvGrpSpPr/>
         <p:nvPr/>
       </p:nvGrpSpPr>
-      <p:grpSpPr/>
+      <p:grpSpPr>
+        <a:xfrm>
+          <a:off x="0" y="0"/>
+          <a:ext cx="0" cy="0"/>
+          <a:chOff x="0" y="0"/>
+          <a:chExt cx="0" cy="0"/>
+        </a:xfrm>
+      </p:grpSpPr>
       <p:sp>
         <p:nvSpPr>
           <p:cNvPr id="2" name="Title 1"/>
@@ -4957,19 +5109,39 @@
           <a:bodyPr/>
           <a:lstStyle/>
           <a:p>
+            <a:pPr marL="0" indent="0">
+              <a:buNone/>
+              <a:defRPr sz="1800"/>
+            </a:pPr>
+            <a:r>
+              <a:rPr dirty="0"/>
+              <a:t>Reminder:</a:t>
+            </a:r>
+          </a:p>
+          <a:p>
             <a:pPr>
               <a:defRPr sz="1800"/>
             </a:pPr>
             <a:r>
-              <a:t>Reminder:</a:t>
-            </a:r>
+              <a:rPr dirty="0"/>
+              <a:t>Embed Lambda has reserved concurrency = 2 (intentional)</a:t>
+            </a:r>
+            <a:endParaRPr lang="en-GB" dirty="0"/>
           </a:p>
           <a:p>
             <a:pPr>
               <a:defRPr sz="1800"/>
             </a:pPr>
-            <a:r>
-              <a:t>Embed Lambda has reserved concurrency = 2 (intentional)</a:t>
+            <a:endParaRPr dirty="0"/>
+          </a:p>
+          <a:p>
+            <a:pPr marL="0" indent="0">
+              <a:buNone/>
+              <a:defRPr sz="1800"/>
+            </a:pPr>
+            <a:r>
+              <a:rPr dirty="0"/>
+              <a:t>Evidence sources:</a:t>
             </a:r>
           </a:p>
           <a:p>
@@ -4977,7 +5149,8 @@
               <a:defRPr sz="1800"/>
             </a:pPr>
             <a:r>
-              <a:t>Evidence sources:</a:t>
+              <a:rPr dirty="0"/>
+              <a:t>CloudWatch dashboard: Embed Throttles</a:t>
             </a:r>
           </a:p>
           <a:p>
@@ -4985,7 +5158,8 @@
               <a:defRPr sz="1800"/>
             </a:pPr>
             <a:r>
-              <a:t>CloudWatch dashboard: Embed Throttles</a:t>
+              <a:rPr dirty="0"/>
+              <a:t>Step Functions failures</a:t>
             </a:r>
           </a:p>
           <a:p>
@@ -4993,7 +5167,30 @@
               <a:defRPr sz="1800"/>
             </a:pPr>
             <a:r>
-              <a:t>Step Functions failures</a:t>
+              <a:rPr dirty="0"/>
+              <a:t>Execution event history shows </a:t>
+            </a:r>
+            <a:r>
+              <a:rPr dirty="0" err="1"/>
+              <a:t>TooManyRequests</a:t>
+            </a:r>
+            <a:endParaRPr dirty="0"/>
+          </a:p>
+          <a:p>
+            <a:pPr marL="0" indent="0">
+              <a:buNone/>
+              <a:defRPr sz="1800"/>
+            </a:pPr>
+            <a:endParaRPr lang="en-GB" dirty="0"/>
+          </a:p>
+          <a:p>
+            <a:pPr marL="0" indent="0">
+              <a:buNone/>
+              <a:defRPr sz="1800"/>
+            </a:pPr>
+            <a:r>
+              <a:rPr dirty="0"/>
+              <a:t>Classification:</a:t>
             </a:r>
           </a:p>
           <a:p>
@@ -5001,22 +5198,7 @@
               <a:defRPr sz="1800"/>
             </a:pPr>
             <a:r>
-              <a:t>Execution event history shows TooManyRequests</a:t>
-            </a:r>
-          </a:p>
-          <a:p>
-            <a:pPr>
-              <a:defRPr sz="1800"/>
-            </a:pPr>
-            <a:r>
-              <a:t>Classification:</a:t>
-            </a:r>
-          </a:p>
-          <a:p>
-            <a:pPr>
-              <a:defRPr sz="1800"/>
-            </a:pPr>
-            <a:r>
+              <a:rPr dirty="0"/>
               <a:t>Throttled</a:t>
             </a:r>
           </a:p>
@@ -5031,7 +5213,7 @@
 </file>
 
 <file path=ppt/slides/slide7.xml><?xml version="1.0" encoding="utf-8"?>
-<p:sld xmlns:a="http://schemas.openxmlformats.org/drawingml/2006/main" xmlns:p="http://schemas.openxmlformats.org/presentationml/2006/main" xmlns:r="http://schemas.openxmlformats.org/officeDocument/2006/relationships">
+<p:sld xmlns:a="http://schemas.openxmlformats.org/drawingml/2006/main" xmlns:r="http://schemas.openxmlformats.org/officeDocument/2006/relationships" xmlns:p="http://schemas.openxmlformats.org/presentationml/2006/main">
   <p:cSld>
     <p:spTree>
       <p:nvGrpSpPr>
@@ -5039,7 +5221,14 @@
         <p:cNvGrpSpPr/>
         <p:nvPr/>
       </p:nvGrpSpPr>
-      <p:grpSpPr/>
+      <p:grpSpPr>
+        <a:xfrm>
+          <a:off x="0" y="0"/>
+          <a:ext cx="0" cy="0"/>
+          <a:chOff x="0" y="0"/>
+          <a:chExt cx="0" cy="0"/>
+        </a:xfrm>
+      </p:grpSpPr>
       <p:sp>
         <p:nvSpPr>
           <p:cNvPr id="2" name="Title 1"/>
@@ -5052,11 +5241,14 @@
         </p:nvSpPr>
         <p:spPr/>
         <p:txBody>
-          <a:bodyPr/>
-          <a:lstStyle/>
-          <a:p>
-            <a:r>
-              <a:t>Activity 2 (groups of 3): Incident report in 6 minutes</a:t>
+          <a:bodyPr>
+            <a:normAutofit fontScale="90000"/>
+          </a:bodyPr>
+          <a:lstStyle/>
+          <a:p>
+            <a:r>
+              <a:rPr dirty="0"/>
+              <a:t>Activity 2: Incident report in 6 minutes</a:t>
             </a:r>
           </a:p>
         </p:txBody>
@@ -5080,23 +5272,64 @@
               <a:defRPr sz="1800"/>
             </a:pPr>
             <a:r>
-              <a:t>Give each group this template:</a:t>
+              <a:rPr lang="en-GB" dirty="0"/>
+              <a:t>Suggest working in groups of 3. </a:t>
+            </a:r>
+            <a:endParaRPr dirty="0"/>
+          </a:p>
+          <a:p>
+            <a:pPr lvl="1">
+              <a:defRPr sz="1800"/>
+            </a:pPr>
+            <a:r>
+              <a:rPr dirty="0"/>
+              <a:t>What happened? (one sentence)</a:t>
+            </a:r>
+          </a:p>
+          <a:p>
+            <a:pPr lvl="1">
+              <a:defRPr sz="1800"/>
+            </a:pPr>
+            <a:r>
+              <a:rPr dirty="0"/>
+              <a:t>Evidence: (dashboard + execution + log)</a:t>
+            </a:r>
+          </a:p>
+          <a:p>
+            <a:pPr lvl="1">
+              <a:defRPr sz="1800"/>
+            </a:pPr>
+            <a:r>
+              <a:rPr dirty="0"/>
+              <a:t>Classification: (one of the 4 leaves)</a:t>
+            </a:r>
+          </a:p>
+          <a:p>
+            <a:pPr lvl="1">
+              <a:defRPr sz="1800"/>
+            </a:pPr>
+            <a:r>
+              <a:rPr dirty="0"/>
+              <a:t>First action: (one safe change + why)</a:t>
             </a:r>
           </a:p>
           <a:p>
             <a:pPr>
               <a:defRPr sz="1800"/>
             </a:pPr>
-            <a:r>
-              <a:t>What happened? (one sentence)</a:t>
-            </a:r>
+            <a:endParaRPr lang="en-GB" dirty="0"/>
           </a:p>
           <a:p>
             <a:pPr>
               <a:defRPr sz="1800"/>
             </a:pPr>
             <a:r>
-              <a:t>Evidence: (dashboard + execution + log)</a:t>
+              <a:rPr lang="en-GB" dirty="0"/>
+              <a:t>Not acceptable: </a:t>
+            </a:r>
+            <a:r>
+              <a:rPr dirty="0"/>
+              <a:t>“we just increase everything”.</a:t>
             </a:r>
           </a:p>
           <a:p>
@@ -5104,39 +5337,12 @@
               <a:defRPr sz="1800"/>
             </a:pPr>
             <a:r>
-              <a:t>Classification: (one of the 4 leaves)</a:t>
-            </a:r>
-          </a:p>
-          <a:p>
-            <a:pPr>
-              <a:defRPr sz="1800"/>
-            </a:pPr>
-            <a:r>
-              <a:t>First action: (one safe change + why)</a:t>
-            </a:r>
-          </a:p>
-          <a:p>
-            <a:pPr>
-              <a:defRPr sz="1800"/>
-            </a:pPr>
-            <a:r>
-              <a:t>Coach note:</a:t>
-            </a:r>
-          </a:p>
-          <a:p>
-            <a:pPr>
-              <a:defRPr sz="1800"/>
-            </a:pPr>
-            <a:r>
-              <a:t>Don’t allow “we just increase everything”.</a:t>
-            </a:r>
-          </a:p>
-          <a:p>
-            <a:pPr>
-              <a:defRPr sz="1800"/>
-            </a:pPr>
-            <a:r>
-              <a:t>Make them tie evidence to action.</a:t>
+              <a:rPr lang="en-GB" dirty="0"/>
+              <a:t>We need to</a:t>
+            </a:r>
+            <a:r>
+              <a:rPr dirty="0"/>
+              <a:t> tie evidence to action.</a:t>
             </a:r>
           </a:p>
         </p:txBody>
@@ -5150,7 +5356,7 @@
 </file>
 
 <file path=ppt/slides/slide8.xml><?xml version="1.0" encoding="utf-8"?>
-<p:sld xmlns:a="http://schemas.openxmlformats.org/drawingml/2006/main" xmlns:p="http://schemas.openxmlformats.org/presentationml/2006/main" xmlns:r="http://schemas.openxmlformats.org/officeDocument/2006/relationships">
+<p:sld xmlns:a="http://schemas.openxmlformats.org/drawingml/2006/main" xmlns:r="http://schemas.openxmlformats.org/officeDocument/2006/relationships" xmlns:p="http://schemas.openxmlformats.org/presentationml/2006/main">
   <p:cSld>
     <p:spTree>
       <p:nvGrpSpPr>
@@ -5158,7 +5364,14 @@
         <p:cNvGrpSpPr/>
         <p:nvPr/>
       </p:nvGrpSpPr>
-      <p:grpSpPr/>
+      <p:grpSpPr>
+        <a:xfrm>
+          <a:off x="0" y="0"/>
+          <a:ext cx="0" cy="0"/>
+          <a:chOff x="0" y="0"/>
+          <a:chExt cx="0" cy="0"/>
+        </a:xfrm>
+      </p:grpSpPr>
       <p:sp>
         <p:nvSpPr>
           <p:cNvPr id="2" name="Title 1"/>
@@ -5199,15 +5412,35 @@
               <a:defRPr sz="1800"/>
             </a:pPr>
             <a:r>
+              <a:rPr dirty="0"/>
               <a:t>Run:</a:t>
             </a:r>
           </a:p>
           <a:p>
+            <a:pPr lvl="1">
+              <a:defRPr sz="1800"/>
+            </a:pPr>
+            <a:r>
+              <a:rPr dirty="0"/>
+              <a:t>`NEW_RC=10 ./scripts/04_scale_up_embed_concurrency.sh`</a:t>
+            </a:r>
+          </a:p>
+          <a:p>
             <a:pPr>
               <a:defRPr sz="1800"/>
             </a:pPr>
             <a:r>
-              <a:t>`NEW_RC=10 ./scripts/04_scale_up_embed_concurrency.sh`</a:t>
+              <a:rPr dirty="0"/>
+              <a:t>Then run the burst again:</a:t>
+            </a:r>
+          </a:p>
+          <a:p>
+            <a:pPr lvl="1">
+              <a:defRPr sz="1800"/>
+            </a:pPr>
+            <a:r>
+              <a:rPr dirty="0"/>
+              <a:t>`N=40 ./scripts/03_burst_load.sh`</a:t>
             </a:r>
           </a:p>
           <a:p>
@@ -5215,46 +5448,34 @@
               <a:defRPr sz="1800"/>
             </a:pPr>
             <a:r>
-              <a:t>Then run the burst again:</a:t>
-            </a:r>
-          </a:p>
-          <a:p>
-            <a:pPr>
-              <a:defRPr sz="1800"/>
-            </a:pPr>
-            <a:r>
-              <a:t>`N=40 ./scripts/03_burst_load.sh`</a:t>
-            </a:r>
-          </a:p>
-          <a:p>
-            <a:pPr>
-              <a:defRPr sz="1800"/>
-            </a:pPr>
-            <a:r>
+              <a:rPr dirty="0"/>
               <a:t>Expected change:</a:t>
             </a:r>
           </a:p>
           <a:p>
-            <a:pPr>
-              <a:defRPr sz="1800"/>
-            </a:pPr>
-            <a:r>
+            <a:pPr lvl="1">
+              <a:defRPr sz="1800"/>
+            </a:pPr>
+            <a:r>
+              <a:rPr dirty="0"/>
               <a:t>Throttles reduce</a:t>
             </a:r>
           </a:p>
           <a:p>
-            <a:pPr>
-              <a:defRPr sz="1800"/>
-            </a:pPr>
-            <a:r>
+            <a:pPr lvl="1">
+              <a:defRPr sz="1800"/>
+            </a:pPr>
+            <a:r>
+              <a:rPr dirty="0"/>
               <a:t>More executions succeed</a:t>
             </a:r>
           </a:p>
           <a:p>
-            <a:pPr>
-              <a:defRPr sz="1800"/>
-            </a:pPr>
-            <a:r>
+            <a:pPr lvl="1">
+              <a:defRPr sz="1800"/>
+            </a:pPr>
+            <a:r>
+              <a:rPr dirty="0"/>
               <a:t>“Wall” moves</a:t>
             </a:r>
           </a:p>
@@ -5269,7 +5490,7 @@
 </file>
 
 <file path=ppt/slides/slide9.xml><?xml version="1.0" encoding="utf-8"?>
-<p:sld xmlns:a="http://schemas.openxmlformats.org/drawingml/2006/main" xmlns:p="http://schemas.openxmlformats.org/presentationml/2006/main" xmlns:r="http://schemas.openxmlformats.org/officeDocument/2006/relationships">
+<p:sld xmlns:a="http://schemas.openxmlformats.org/drawingml/2006/main" xmlns:r="http://schemas.openxmlformats.org/officeDocument/2006/relationships" xmlns:p="http://schemas.openxmlformats.org/presentationml/2006/main">
   <p:cSld>
     <p:spTree>
       <p:nvGrpSpPr>
@@ -5277,7 +5498,14 @@
         <p:cNvGrpSpPr/>
         <p:nvPr/>
       </p:nvGrpSpPr>
-      <p:grpSpPr/>
+      <p:grpSpPr>
+        <a:xfrm>
+          <a:off x="0" y="0"/>
+          <a:ext cx="0" cy="0"/>
+          <a:chOff x="0" y="0"/>
+          <a:chExt cx="0" cy="0"/>
+        </a:xfrm>
+      </p:grpSpPr>
       <p:sp>
         <p:nvSpPr>
           <p:cNvPr id="2" name="Title 1"/>
@@ -5318,7 +5546,25 @@
               <a:defRPr sz="1800"/>
             </a:pPr>
             <a:r>
-              <a:t>Scaling knobs are trade-offs:</a:t>
+              <a:rPr dirty="0"/>
+              <a:t>Scaling </a:t>
+            </a:r>
+            <a:r>
+              <a:rPr lang="en-GB" dirty="0"/>
+              <a:t>controls</a:t>
+            </a:r>
+            <a:r>
+              <a:rPr dirty="0"/>
+              <a:t> are trade-offs:</a:t>
+            </a:r>
+          </a:p>
+          <a:p>
+            <a:pPr lvl="1">
+              <a:defRPr sz="1800"/>
+            </a:pPr>
+            <a:r>
+              <a:rPr dirty="0"/>
+              <a:t>More concurrency = more throughput</a:t>
             </a:r>
           </a:p>
           <a:p>
@@ -5326,38 +5572,43 @@
               <a:defRPr sz="1800"/>
             </a:pPr>
             <a:r>
-              <a:t>More concurrency = more throughput</a:t>
-            </a:r>
-          </a:p>
-          <a:p>
-            <a:pPr>
-              <a:defRPr sz="1800"/>
-            </a:pPr>
-            <a:r>
+              <a:rPr dirty="0"/>
               <a:t>But you can still hit:</a:t>
             </a:r>
           </a:p>
           <a:p>
-            <a:pPr>
-              <a:defRPr sz="1800"/>
-            </a:pPr>
-            <a:r>
+            <a:pPr lvl="1">
+              <a:defRPr sz="1800"/>
+            </a:pPr>
+            <a:r>
+              <a:rPr dirty="0"/>
               <a:t>account limits</a:t>
             </a:r>
           </a:p>
           <a:p>
-            <a:pPr>
-              <a:defRPr sz="1800"/>
-            </a:pPr>
-            <a:r>
+            <a:pPr lvl="1">
+              <a:defRPr sz="1800"/>
+            </a:pPr>
+            <a:r>
+              <a:rPr lang="en-GB" dirty="0"/>
+              <a:t>"</a:t>
+            </a:r>
+            <a:r>
+              <a:rPr dirty="0"/>
               <a:t>cold starts</a:t>
             </a:r>
-          </a:p>
-          <a:p>
-            <a:pPr>
-              <a:defRPr sz="1800"/>
-            </a:pPr>
-            <a:r>
+            <a:r>
+              <a:rPr lang="en-GB" dirty="0"/>
+              <a:t>"</a:t>
+            </a:r>
+            <a:endParaRPr dirty="0"/>
+          </a:p>
+          <a:p>
+            <a:pPr lvl="1">
+              <a:defRPr sz="1800"/>
+            </a:pPr>
+            <a:r>
+              <a:rPr dirty="0"/>
               <a:t>downstream bottlenecks</a:t>
             </a:r>
           </a:p>
@@ -5702,44 +5953,44 @@
         <a:sysClr val="window" lastClr="FFFFFF"/>
       </a:lt1>
       <a:dk2>
-        <a:srgbClr val="1F497D"/>
+        <a:srgbClr val="0E2841"/>
       </a:dk2>
       <a:lt2>
-        <a:srgbClr val="EEECE1"/>
+        <a:srgbClr val="E8E8E8"/>
       </a:lt2>
       <a:accent1>
-        <a:srgbClr val="4F81BD"/>
+        <a:srgbClr val="156082"/>
       </a:accent1>
       <a:accent2>
-        <a:srgbClr val="C0504D"/>
+        <a:srgbClr val="E97132"/>
       </a:accent2>
       <a:accent3>
-        <a:srgbClr val="9BBB59"/>
+        <a:srgbClr val="196B24"/>
       </a:accent3>
       <a:accent4>
-        <a:srgbClr val="8064A2"/>
+        <a:srgbClr val="0F9ED5"/>
       </a:accent4>
       <a:accent5>
-        <a:srgbClr val="4BACC6"/>
+        <a:srgbClr val="A02B93"/>
       </a:accent5>
       <a:accent6>
-        <a:srgbClr val="F79646"/>
+        <a:srgbClr val="4EA72E"/>
       </a:accent6>
       <a:hlink>
-        <a:srgbClr val="0000FF"/>
+        <a:srgbClr val="467886"/>
       </a:hlink>
       <a:folHlink>
-        <a:srgbClr val="800080"/>
+        <a:srgbClr val="96607D"/>
       </a:folHlink>
     </a:clrScheme>
     <a:fontScheme name="Office">
       <a:majorFont>
-        <a:latin typeface="Calibri"/>
+        <a:latin typeface="Aptos Display" panose="02110004020202020204"/>
         <a:ea typeface=""/>
         <a:cs typeface=""/>
-        <a:font script="Jpan" typeface="ＭＳ Ｐゴシック"/>
+        <a:font script="Jpan" typeface="游ゴシック Light"/>
         <a:font script="Hang" typeface="맑은 고딕"/>
-        <a:font script="Hans" typeface="宋体"/>
+        <a:font script="Hans" typeface="等线 Light"/>
         <a:font script="Hant" typeface="新細明體"/>
         <a:font script="Arab" typeface="Times New Roman"/>
         <a:font script="Hebr" typeface="Times New Roman"/>
@@ -5767,14 +6018,31 @@
         <a:font script="Viet" typeface="Times New Roman"/>
         <a:font script="Uigh" typeface="Microsoft Uighur"/>
         <a:font script="Geor" typeface="Sylfaen"/>
+        <a:font script="Armn" typeface="Arial"/>
+        <a:font script="Bugi" typeface="Leelawadee UI"/>
+        <a:font script="Bopo" typeface="Microsoft JhengHei"/>
+        <a:font script="Java" typeface="Javanese Text"/>
+        <a:font script="Lisu" typeface="Segoe UI"/>
+        <a:font script="Mymr" typeface="Myanmar Text"/>
+        <a:font script="Nkoo" typeface="Ebrima"/>
+        <a:font script="Olck" typeface="Nirmala UI"/>
+        <a:font script="Osma" typeface="Ebrima"/>
+        <a:font script="Phag" typeface="Phagspa"/>
+        <a:font script="Syrn" typeface="Estrangelo Edessa"/>
+        <a:font script="Syrj" typeface="Estrangelo Edessa"/>
+        <a:font script="Syre" typeface="Estrangelo Edessa"/>
+        <a:font script="Sora" typeface="Nirmala UI"/>
+        <a:font script="Tale" typeface="Microsoft Tai Le"/>
+        <a:font script="Talu" typeface="Microsoft New Tai Lue"/>
+        <a:font script="Tfng" typeface="Ebrima"/>
       </a:majorFont>
       <a:minorFont>
-        <a:latin typeface="Calibri"/>
+        <a:latin typeface="Aptos" panose="02110004020202020204"/>
         <a:ea typeface=""/>
         <a:cs typeface=""/>
-        <a:font script="Jpan" typeface="ＭＳ Ｐゴシック"/>
+        <a:font script="Jpan" typeface="游ゴシック"/>
         <a:font script="Hang" typeface="맑은 고딕"/>
-        <a:font script="Hans" typeface="宋体"/>
+        <a:font script="Hans" typeface="等线"/>
         <a:font script="Hant" typeface="新細明體"/>
         <a:font script="Arab" typeface="Arial"/>
         <a:font script="Hebr" typeface="Arial"/>
@@ -5802,6 +6070,23 @@
         <a:font script="Viet" typeface="Arial"/>
         <a:font script="Uigh" typeface="Microsoft Uighur"/>
         <a:font script="Geor" typeface="Sylfaen"/>
+        <a:font script="Armn" typeface="Arial"/>
+        <a:font script="Bugi" typeface="Leelawadee UI"/>
+        <a:font script="Bopo" typeface="Microsoft JhengHei"/>
+        <a:font script="Java" typeface="Javanese Text"/>
+        <a:font script="Lisu" typeface="Segoe UI"/>
+        <a:font script="Mymr" typeface="Myanmar Text"/>
+        <a:font script="Nkoo" typeface="Ebrima"/>
+        <a:font script="Olck" typeface="Nirmala UI"/>
+        <a:font script="Osma" typeface="Ebrima"/>
+        <a:font script="Phag" typeface="Phagspa"/>
+        <a:font script="Syrn" typeface="Estrangelo Edessa"/>
+        <a:font script="Syrj" typeface="Estrangelo Edessa"/>
+        <a:font script="Syre" typeface="Estrangelo Edessa"/>
+        <a:font script="Sora" typeface="Nirmala UI"/>
+        <a:font script="Tale" typeface="Microsoft Tai Le"/>
+        <a:font script="Talu" typeface="Microsoft New Tai Lue"/>
+        <a:font script="Tfng" typeface="Ebrima"/>
       </a:minorFont>
     </a:fontScheme>
     <a:fmtScheme name="Office">
@@ -5813,180 +6098,136 @@
           <a:gsLst>
             <a:gs pos="0">
               <a:schemeClr val="phClr">
-                <a:tint val="50000"/>
-                <a:satMod val="300000"/>
+                <a:lumMod val="110000"/>
+                <a:satMod val="105000"/>
+                <a:tint val="67000"/>
               </a:schemeClr>
             </a:gs>
-            <a:gs pos="35000">
+            <a:gs pos="50000">
               <a:schemeClr val="phClr">
-                <a:tint val="37000"/>
-                <a:satMod val="300000"/>
+                <a:lumMod val="105000"/>
+                <a:satMod val="103000"/>
+                <a:tint val="73000"/>
               </a:schemeClr>
             </a:gs>
             <a:gs pos="100000">
               <a:schemeClr val="phClr">
-                <a:tint val="15000"/>
-                <a:satMod val="350000"/>
+                <a:lumMod val="105000"/>
+                <a:satMod val="109000"/>
+                <a:tint val="81000"/>
               </a:schemeClr>
             </a:gs>
           </a:gsLst>
-          <a:lin ang="16200000" scaled="1"/>
+          <a:lin ang="5400000" scaled="0"/>
         </a:gradFill>
         <a:gradFill rotWithShape="1">
           <a:gsLst>
             <a:gs pos="0">
               <a:schemeClr val="phClr">
-                <a:tint val="100000"/>
+                <a:satMod val="103000"/>
+                <a:lumMod val="102000"/>
+                <a:tint val="94000"/>
+              </a:schemeClr>
+            </a:gs>
+            <a:gs pos="50000">
+              <a:schemeClr val="phClr">
+                <a:satMod val="110000"/>
+                <a:lumMod val="100000"/>
                 <a:shade val="100000"/>
-                <a:satMod val="130000"/>
               </a:schemeClr>
             </a:gs>
             <a:gs pos="100000">
               <a:schemeClr val="phClr">
-                <a:tint val="50000"/>
-                <a:shade val="100000"/>
-                <a:satMod val="350000"/>
+                <a:lumMod val="99000"/>
+                <a:satMod val="120000"/>
+                <a:shade val="78000"/>
               </a:schemeClr>
             </a:gs>
           </a:gsLst>
-          <a:lin ang="16200000" scaled="0"/>
+          <a:lin ang="5400000" scaled="0"/>
         </a:gradFill>
       </a:fillStyleLst>
       <a:lnStyleLst>
-        <a:ln w="9525" cap="flat" cmpd="sng" algn="ctr">
+        <a:ln w="12700" cap="flat" cmpd="sng" algn="ctr">
           <a:solidFill>
-            <a:schemeClr val="phClr">
-              <a:shade val="95000"/>
-              <a:satMod val="105000"/>
-            </a:schemeClr>
+            <a:schemeClr val="phClr"/>
           </a:solidFill>
           <a:prstDash val="solid"/>
+          <a:miter lim="800000"/>
+        </a:ln>
+        <a:ln w="19050" cap="flat" cmpd="sng" algn="ctr">
+          <a:solidFill>
+            <a:schemeClr val="phClr"/>
+          </a:solidFill>
+          <a:prstDash val="solid"/>
+          <a:miter lim="800000"/>
         </a:ln>
         <a:ln w="25400" cap="flat" cmpd="sng" algn="ctr">
           <a:solidFill>
             <a:schemeClr val="phClr"/>
           </a:solidFill>
           <a:prstDash val="solid"/>
-        </a:ln>
-        <a:ln w="38100" cap="flat" cmpd="sng" algn="ctr">
-          <a:solidFill>
-            <a:schemeClr val="phClr"/>
-          </a:solidFill>
-          <a:prstDash val="solid"/>
+          <a:miter lim="800000"/>
         </a:ln>
       </a:lnStyleLst>
       <a:effectStyleLst>
         <a:effectStyle>
+          <a:effectLst/>
+        </a:effectStyle>
+        <a:effectStyle>
+          <a:effectLst/>
+        </a:effectStyle>
+        <a:effectStyle>
           <a:effectLst>
-            <a:outerShdw blurRad="40000" dist="20000" dir="5400000" rotWithShape="0">
+            <a:outerShdw blurRad="57150" dist="19050" dir="5400000" algn="ctr" rotWithShape="0">
               <a:srgbClr val="000000">
-                <a:alpha val="38000"/>
+                <a:alpha val="63000"/>
               </a:srgbClr>
             </a:outerShdw>
           </a:effectLst>
-        </a:effectStyle>
-        <a:effectStyle>
-          <a:effectLst>
-            <a:outerShdw blurRad="40000" dist="23000" dir="5400000" rotWithShape="0">
-              <a:srgbClr val="000000">
-                <a:alpha val="35000"/>
-              </a:srgbClr>
-            </a:outerShdw>
-          </a:effectLst>
-        </a:effectStyle>
-        <a:effectStyle>
-          <a:effectLst>
-            <a:outerShdw blurRad="40000" dist="23000" dir="5400000" rotWithShape="0">
-              <a:srgbClr val="000000">
-                <a:alpha val="35000"/>
-              </a:srgbClr>
-            </a:outerShdw>
-          </a:effectLst>
-          <a:scene3d>
-            <a:camera prst="orthographicFront">
-              <a:rot lat="0" lon="0" rev="0"/>
-            </a:camera>
-            <a:lightRig rig="threePt" dir="t">
-              <a:rot lat="0" lon="0" rev="1200000"/>
-            </a:lightRig>
-          </a:scene3d>
-          <a:sp3d>
-            <a:bevelT w="63500" h="25400"/>
-          </a:sp3d>
         </a:effectStyle>
       </a:effectStyleLst>
       <a:bgFillStyleLst>
         <a:solidFill>
           <a:schemeClr val="phClr"/>
         </a:solidFill>
+        <a:solidFill>
+          <a:schemeClr val="phClr">
+            <a:tint val="95000"/>
+            <a:satMod val="170000"/>
+          </a:schemeClr>
+        </a:solidFill>
         <a:gradFill rotWithShape="1">
           <a:gsLst>
             <a:gs pos="0">
               <a:schemeClr val="phClr">
-                <a:tint val="40000"/>
-                <a:satMod val="350000"/>
+                <a:tint val="93000"/>
+                <a:satMod val="150000"/>
+                <a:shade val="98000"/>
+                <a:lumMod val="102000"/>
               </a:schemeClr>
             </a:gs>
-            <a:gs pos="40000">
+            <a:gs pos="50000">
               <a:schemeClr val="phClr">
-                <a:tint val="45000"/>
-                <a:shade val="99000"/>
-                <a:satMod val="350000"/>
+                <a:tint val="98000"/>
+                <a:satMod val="130000"/>
+                <a:shade val="90000"/>
+                <a:lumMod val="103000"/>
               </a:schemeClr>
             </a:gs>
             <a:gs pos="100000">
               <a:schemeClr val="phClr">
-                <a:shade val="20000"/>
-                <a:satMod val="255000"/>
+                <a:shade val="63000"/>
+                <a:satMod val="120000"/>
               </a:schemeClr>
             </a:gs>
           </a:gsLst>
-          <a:path path="circle">
-            <a:fillToRect l="50000" t="-80000" r="50000" b="180000"/>
-          </a:path>
-        </a:gradFill>
-        <a:gradFill rotWithShape="1">
-          <a:gsLst>
-            <a:gs pos="0">
-              <a:schemeClr val="phClr">
-                <a:tint val="80000"/>
-                <a:satMod val="300000"/>
-              </a:schemeClr>
-            </a:gs>
-            <a:gs pos="100000">
-              <a:schemeClr val="phClr">
-                <a:shade val="30000"/>
-                <a:satMod val="200000"/>
-              </a:schemeClr>
-            </a:gs>
-          </a:gsLst>
-          <a:path path="circle">
-            <a:fillToRect l="50000" t="50000" r="50000" b="50000"/>
-          </a:path>
+          <a:lin ang="5400000" scaled="0"/>
         </a:gradFill>
       </a:bgFillStyleLst>
     </a:fmtScheme>
   </a:themeElements>
   <a:objectDefaults>
-    <a:spDef>
-      <a:spPr/>
-      <a:bodyPr/>
-      <a:lstStyle/>
-      <a:style>
-        <a:lnRef idx="1">
-          <a:schemeClr val="accent1"/>
-        </a:lnRef>
-        <a:fillRef idx="3">
-          <a:schemeClr val="accent1"/>
-        </a:fillRef>
-        <a:effectRef idx="2">
-          <a:schemeClr val="accent1"/>
-        </a:effectRef>
-        <a:fontRef idx="minor">
-          <a:schemeClr val="lt1"/>
-        </a:fontRef>
-      </a:style>
-    </a:spDef>
     <a:lnDef>
       <a:spPr/>
       <a:bodyPr/>
@@ -6008,5 +6249,10 @@
     </a:lnDef>
   </a:objectDefaults>
   <a:extraClrSchemeLst/>
+  <a:extLst>
+    <a:ext uri="{05A4C25C-085E-4340-85A3-A5531E510DB2}">
+      <thm15:themeFamily xmlns:thm15="http://schemas.microsoft.com/office/thememl/2012/main" name="Office Theme" id="{2E142A2C-CD16-42D6-873A-C26D2A0506FA}" vid="{1BDDFF52-6CD6-40A5-AB3C-68EB2F1E4D0A}"/>
+    </a:ext>
+  </a:extLst>
 </a:theme>
 </file>